--- a/V2授课PPT/W03-第5次课-认识工业数据的两大容器.pptx
+++ b/V2授课PPT/W03-第5次课-认识工业数据的两大容器.pptx
@@ -53,6 +53,9 @@
     <p:sldId id="335" r:id="rId87"/>
     <p:sldId id="337" r:id="rId89"/>
     <p:sldId id="338" r:id="rId90"/>
+    <p:sldId id="369" r:id="rId69"/>
+    <p:sldId id="370" r:id="rId68"/>
+    <p:sldId id="371" r:id="rId67"/>
     <p:sldId id="339" r:id="rId91"/>
     <p:sldId id="340" r:id="rId92"/>
     <p:sldId id="341" r:id="rId93"/>
@@ -8988,7 +8991,7 @@
                 </a:solidFill>
                 <a:latin typeface="微软雅黑"/>
               </a:rPr>
-              <a:t>10 / 64</a:t>
+              <a:t>10 / 67</a:t>
             </a:r>
           </a:p>
         </p:txBody>
@@ -9694,7 +9697,7 @@
                 </a:solidFill>
                 <a:latin typeface="微软雅黑"/>
               </a:rPr>
-              <a:t>11 / 64</a:t>
+              <a:t>11 / 67</a:t>
             </a:r>
           </a:p>
         </p:txBody>
@@ -10400,7 +10403,7 @@
                 </a:solidFill>
                 <a:latin typeface="微软雅黑"/>
               </a:rPr>
-              <a:t>12 / 64</a:t>
+              <a:t>12 / 67</a:t>
             </a:r>
           </a:p>
         </p:txBody>
@@ -11106,7 +11109,7 @@
                 </a:solidFill>
                 <a:latin typeface="微软雅黑"/>
               </a:rPr>
-              <a:t>13 / 64</a:t>
+              <a:t>13 / 67</a:t>
             </a:r>
           </a:p>
         </p:txBody>
@@ -11592,7 +11595,7 @@
                 </a:solidFill>
                 <a:latin typeface="微软雅黑"/>
               </a:rPr>
-              <a:t>14 / 64</a:t>
+              <a:t>14 / 67</a:t>
             </a:r>
           </a:p>
         </p:txBody>
@@ -12663,7 +12666,7 @@
                 </a:solidFill>
                 <a:latin typeface="微软雅黑"/>
               </a:rPr>
-              <a:t>15 / 64</a:t>
+              <a:t>15 / 67</a:t>
             </a:r>
           </a:p>
         </p:txBody>
@@ -13369,7 +13372,7 @@
                 </a:solidFill>
                 <a:latin typeface="微软雅黑"/>
               </a:rPr>
-              <a:t>16 / 64</a:t>
+              <a:t>16 / 67</a:t>
             </a:r>
           </a:p>
         </p:txBody>
@@ -13843,7 +13846,7 @@
                 </a:solidFill>
                 <a:latin typeface="微软雅黑"/>
               </a:rPr>
-              <a:t>17 / 64</a:t>
+              <a:t>17 / 67</a:t>
             </a:r>
           </a:p>
         </p:txBody>
@@ -14549,7 +14552,7 @@
                 </a:solidFill>
                 <a:latin typeface="微软雅黑"/>
               </a:rPr>
-              <a:t>18 / 64</a:t>
+              <a:t>18 / 67</a:t>
             </a:r>
           </a:p>
         </p:txBody>
@@ -15521,7 +15524,7 @@
                 </a:solidFill>
                 <a:latin typeface="微软雅黑"/>
               </a:rPr>
-              <a:t>19 / 64</a:t>
+              <a:t>19 / 67</a:t>
             </a:r>
           </a:p>
         </p:txBody>
@@ -17249,7 +17252,7 @@
                 </a:solidFill>
                 <a:latin typeface="微软雅黑"/>
               </a:rPr>
-              <a:t>2 / 64</a:t>
+              <a:t>2 / 67</a:t>
             </a:r>
           </a:p>
         </p:txBody>
@@ -18104,7 +18107,7 @@
                 </a:solidFill>
                 <a:latin typeface="微软雅黑"/>
               </a:rPr>
-              <a:t>20 / 64</a:t>
+              <a:t>20 / 67</a:t>
             </a:r>
           </a:p>
         </p:txBody>
@@ -19074,7 +19077,7 @@
                 </a:solidFill>
                 <a:latin typeface="微软雅黑"/>
               </a:rPr>
-              <a:t>21 / 64</a:t>
+              <a:t>21 / 67</a:t>
             </a:r>
           </a:p>
         </p:txBody>
@@ -20044,7 +20047,7 @@
                 </a:solidFill>
                 <a:latin typeface="微软雅黑"/>
               </a:rPr>
-              <a:t>22 / 64</a:t>
+              <a:t>22 / 67</a:t>
             </a:r>
           </a:p>
         </p:txBody>
@@ -21014,7 +21017,7 @@
                 </a:solidFill>
                 <a:latin typeface="微软雅黑"/>
               </a:rPr>
-              <a:t>23 / 64</a:t>
+              <a:t>23 / 67</a:t>
             </a:r>
           </a:p>
         </p:txBody>
@@ -21984,7 +21987,7 @@
                 </a:solidFill>
                 <a:latin typeface="微软雅黑"/>
               </a:rPr>
-              <a:t>24 / 64</a:t>
+              <a:t>24 / 67</a:t>
             </a:r>
           </a:p>
         </p:txBody>
@@ -22954,7 +22957,7 @@
                 </a:solidFill>
                 <a:latin typeface="微软雅黑"/>
               </a:rPr>
-              <a:t>25 / 64</a:t>
+              <a:t>25 / 67</a:t>
             </a:r>
           </a:p>
         </p:txBody>
@@ -23620,7 +23623,7 @@
                 </a:solidFill>
                 <a:latin typeface="微软雅黑"/>
               </a:rPr>
-              <a:t>26 / 64</a:t>
+              <a:t>26 / 67</a:t>
             </a:r>
           </a:p>
         </p:txBody>
@@ -24590,7 +24593,7 @@
                 </a:solidFill>
                 <a:latin typeface="微软雅黑"/>
               </a:rPr>
-              <a:t>27 / 64</a:t>
+              <a:t>27 / 67</a:t>
             </a:r>
           </a:p>
         </p:txBody>
@@ -25560,7 +25563,7 @@
                 </a:solidFill>
                 <a:latin typeface="微软雅黑"/>
               </a:rPr>
-              <a:t>28 / 64</a:t>
+              <a:t>28 / 67</a:t>
             </a:r>
           </a:p>
         </p:txBody>
@@ -26096,7 +26099,7 @@
                 </a:solidFill>
                 <a:latin typeface="微软雅黑"/>
               </a:rPr>
-              <a:t>29 / 64</a:t>
+              <a:t>29 / 67</a:t>
             </a:r>
           </a:p>
         </p:txBody>
@@ -26951,7 +26954,7 @@
                 </a:solidFill>
                 <a:latin typeface="微软雅黑"/>
               </a:rPr>
-              <a:t>3 / 64</a:t>
+              <a:t>3 / 67</a:t>
             </a:r>
           </a:p>
         </p:txBody>
@@ -27923,7 +27926,7 @@
                 </a:solidFill>
                 <a:latin typeface="微软雅黑"/>
               </a:rPr>
-              <a:t>30 / 64</a:t>
+              <a:t>30 / 67</a:t>
             </a:r>
           </a:p>
         </p:txBody>
@@ -28543,7 +28546,7 @@
                 </a:solidFill>
                 <a:latin typeface="微软雅黑"/>
               </a:rPr>
-              <a:t>31 / 64</a:t>
+              <a:t>31 / 67</a:t>
             </a:r>
           </a:p>
         </p:txBody>
@@ -29063,7 +29066,7 @@
                 </a:solidFill>
                 <a:latin typeface="微软雅黑"/>
               </a:rPr>
-              <a:t>32 / 64</a:t>
+              <a:t>32 / 67</a:t>
             </a:r>
           </a:p>
         </p:txBody>
@@ -29507,7 +29510,7 @@
                 </a:solidFill>
                 <a:latin typeface="微软雅黑"/>
               </a:rPr>
-              <a:t>33 / 64</a:t>
+              <a:t>33 / 67</a:t>
             </a:r>
           </a:p>
         </p:txBody>
@@ -30362,7 +30365,7 @@
                 </a:solidFill>
                 <a:latin typeface="微软雅黑"/>
               </a:rPr>
-              <a:t>34 / 64</a:t>
+              <a:t>34 / 67</a:t>
             </a:r>
           </a:p>
         </p:txBody>
@@ -31730,7 +31733,7 @@
                 </a:solidFill>
                 <a:latin typeface="微软雅黑"/>
               </a:rPr>
-              <a:t>35 / 64</a:t>
+              <a:t>35 / 67</a:t>
             </a:r>
           </a:p>
         </p:txBody>
@@ -32522,7 +32525,7 @@
                 </a:solidFill>
                 <a:latin typeface="微软雅黑"/>
               </a:rPr>
-              <a:t>36 / 64</a:t>
+              <a:t>36 / 67</a:t>
             </a:r>
           </a:p>
         </p:txBody>
@@ -33155,7 +33158,7 @@
                 </a:solidFill>
                 <a:latin typeface="微软雅黑"/>
               </a:rPr>
-              <a:t>37 / 64</a:t>
+              <a:t>37 / 67</a:t>
             </a:r>
           </a:p>
         </p:txBody>
@@ -34075,7 +34078,7 @@
                 </a:solidFill>
                 <a:latin typeface="微软雅黑"/>
               </a:rPr>
-              <a:t>38 / 64</a:t>
+              <a:t>38 / 67</a:t>
             </a:r>
           </a:p>
         </p:txBody>
@@ -34995,7 +34998,7 @@
                 </a:solidFill>
                 <a:latin typeface="微软雅黑"/>
               </a:rPr>
-              <a:t>39 / 64</a:t>
+              <a:t>39 / 67</a:t>
             </a:r>
           </a:p>
         </p:txBody>
@@ -35967,7 +35970,7 @@
                 </a:solidFill>
                 <a:latin typeface="微软雅黑"/>
               </a:rPr>
-              <a:t>4 / 64</a:t>
+              <a:t>4 / 67</a:t>
             </a:r>
           </a:p>
         </p:txBody>
@@ -36887,7 +36890,7 @@
                 </a:solidFill>
                 <a:latin typeface="微软雅黑"/>
               </a:rPr>
-              <a:t>40 / 64</a:t>
+              <a:t>40 / 67</a:t>
             </a:r>
           </a:p>
         </p:txBody>
@@ -37826,7 +37829,7 @@
                 </a:solidFill>
                 <a:latin typeface="微软雅黑"/>
               </a:rPr>
-              <a:t>41 / 64</a:t>
+              <a:t>41 / 67</a:t>
             </a:r>
           </a:p>
         </p:txBody>
@@ -38742,7 +38745,7 @@
                 </a:solidFill>
                 <a:latin typeface="微软雅黑"/>
               </a:rPr>
-              <a:t>42 / 64</a:t>
+              <a:t>42 / 67</a:t>
             </a:r>
           </a:p>
         </p:txBody>
@@ -39666,7 +39669,7 @@
                 </a:solidFill>
                 <a:latin typeface="微软雅黑"/>
               </a:rPr>
-              <a:t>43 / 64</a:t>
+              <a:t>43 / 67</a:t>
             </a:r>
           </a:p>
         </p:txBody>
@@ -40458,7 +40461,7 @@
                 </a:solidFill>
                 <a:latin typeface="微软雅黑"/>
               </a:rPr>
-              <a:t>44 / 64</a:t>
+              <a:t>44 / 67</a:t>
             </a:r>
           </a:p>
         </p:txBody>
@@ -41164,7 +41167,7 @@
                 </a:solidFill>
                 <a:latin typeface="微软雅黑"/>
               </a:rPr>
-              <a:t>45 / 64</a:t>
+              <a:t>45 / 67</a:t>
             </a:r>
           </a:p>
         </p:txBody>
@@ -41956,7 +41959,7 @@
                 </a:solidFill>
                 <a:latin typeface="微软雅黑"/>
               </a:rPr>
-              <a:t>46 / 64</a:t>
+              <a:t>46 / 67</a:t>
             </a:r>
           </a:p>
         </p:txBody>
@@ -42811,7 +42814,7 @@
                 </a:solidFill>
                 <a:latin typeface="微软雅黑"/>
               </a:rPr>
-              <a:t>47 / 64</a:t>
+              <a:t>47 / 67</a:t>
             </a:r>
           </a:p>
         </p:txBody>
@@ -43519,7 +43522,7 @@
                 </a:solidFill>
                 <a:latin typeface="微软雅黑"/>
               </a:rPr>
-              <a:t>48 / 64</a:t>
+              <a:t>48 / 67</a:t>
             </a:r>
           </a:p>
         </p:txBody>
@@ -44159,7 +44162,7 @@
                 </a:solidFill>
                 <a:latin typeface="微软雅黑"/>
               </a:rPr>
-              <a:t>49 / 64</a:t>
+              <a:t>52 / 67</a:t>
             </a:r>
           </a:p>
         </p:txBody>
@@ -45627,7 +45630,7 @@
                 </a:solidFill>
                 <a:latin typeface="微软雅黑"/>
               </a:rPr>
-              <a:t>5 / 64</a:t>
+              <a:t>5 / 67</a:t>
             </a:r>
           </a:p>
         </p:txBody>
@@ -46212,7 +46215,7 @@
                 </a:solidFill>
                 <a:latin typeface="微软雅黑"/>
               </a:rPr>
-              <a:t>50 / 64</a:t>
+              <a:t>53 / 67</a:t>
             </a:r>
           </a:p>
         </p:txBody>
@@ -47004,7 +47007,7 @@
                 </a:solidFill>
                 <a:latin typeface="微软雅黑"/>
               </a:rPr>
-              <a:t>51 / 64</a:t>
+              <a:t>54 / 67</a:t>
             </a:r>
           </a:p>
         </p:txBody>
@@ -47598,7 +47601,7 @@
                 </a:solidFill>
                 <a:latin typeface="微软雅黑"/>
               </a:rPr>
-              <a:t>52 / 64</a:t>
+              <a:t>55 / 67</a:t>
             </a:r>
           </a:p>
         </p:txBody>
@@ -49254,7 +49257,7 @@
                 </a:solidFill>
                 <a:latin typeface="微软雅黑"/>
               </a:rPr>
-              <a:t>53 / 64</a:t>
+              <a:t>56 / 67</a:t>
             </a:r>
           </a:p>
         </p:txBody>
@@ -50052,7 +50055,7 @@
                 </a:solidFill>
                 <a:latin typeface="微软雅黑"/>
               </a:rPr>
-              <a:t>54 / 64</a:t>
+              <a:t>57 / 67</a:t>
             </a:r>
           </a:p>
         </p:txBody>
@@ -51198,7 +51201,7 @@
                 </a:solidFill>
                 <a:latin typeface="微软雅黑"/>
               </a:rPr>
-              <a:t>55 / 64</a:t>
+              <a:t>58 / 67</a:t>
             </a:r>
           </a:p>
         </p:txBody>
@@ -52051,7 +52054,7 @@
                 </a:solidFill>
                 <a:latin typeface="微软雅黑"/>
               </a:rPr>
-              <a:t>56 / 64</a:t>
+              <a:t>59 / 67</a:t>
             </a:r>
           </a:p>
         </p:txBody>
@@ -53023,7 +53026,7 @@
                 </a:solidFill>
                 <a:latin typeface="微软雅黑"/>
               </a:rPr>
-              <a:t>57 / 64</a:t>
+              <a:t>60 / 67</a:t>
             </a:r>
           </a:p>
         </p:txBody>
@@ -53995,7 +53998,7 @@
                 </a:solidFill>
                 <a:latin typeface="微软雅黑"/>
               </a:rPr>
-              <a:t>58 / 64</a:t>
+              <a:t>61 / 67</a:t>
             </a:r>
           </a:p>
         </p:txBody>
@@ -55254,7 +55257,7 @@
                 </a:solidFill>
                 <a:latin typeface="微软雅黑"/>
               </a:rPr>
-              <a:t>59 / 64</a:t>
+              <a:t>62 / 67</a:t>
             </a:r>
           </a:p>
         </p:txBody>
@@ -55960,7 +55963,7 @@
                 </a:solidFill>
                 <a:latin typeface="微软雅黑"/>
               </a:rPr>
-              <a:t>6 / 64</a:t>
+              <a:t>6 / 67</a:t>
             </a:r>
           </a:p>
         </p:txBody>
@@ -56932,7 +56935,7 @@
                 </a:solidFill>
                 <a:latin typeface="微软雅黑"/>
               </a:rPr>
-              <a:t>60 / 64</a:t>
+              <a:t>63 / 67</a:t>
             </a:r>
           </a:p>
         </p:txBody>
@@ -57904,7 +57907,7 @@
                 </a:solidFill>
                 <a:latin typeface="微软雅黑"/>
               </a:rPr>
-              <a:t>61 / 64</a:t>
+              <a:t>64 / 67</a:t>
             </a:r>
           </a:p>
         </p:txBody>
@@ -58696,7 +58699,7 @@
                 </a:solidFill>
                 <a:latin typeface="微软雅黑"/>
               </a:rPr>
-              <a:t>62 / 64</a:t>
+              <a:t>65 / 67</a:t>
             </a:r>
           </a:p>
         </p:txBody>
@@ -59056,7 +59059,7 @@
                 </a:solidFill>
                 <a:latin typeface="微软雅黑"/>
               </a:rPr>
-              <a:t>63 / 64</a:t>
+              <a:t>66 / 67</a:t>
             </a:r>
           </a:p>
         </p:txBody>
@@ -59427,6 +59430,3118 @@
 </p:sld>
 </file>
 
+<file path=ppt/slides/slide65.xml><?xml version="1.0" encoding="utf-8"?>
+<p:sld xmlns:a="http://schemas.openxmlformats.org/drawingml/2006/main" xmlns:p="http://schemas.openxmlformats.org/presentationml/2006/main" xmlns:r="http://schemas.openxmlformats.org/officeDocument/2006/relationships">
+  <p:cSld>
+    <p:spTree>
+      <p:nvGrpSpPr>
+        <p:cNvPr id="1" name=""/>
+        <p:cNvGrpSpPr/>
+        <p:nvPr/>
+      </p:nvGrpSpPr>
+      <p:grpSpPr/>
+      <p:sp>
+        <p:nvSpPr>
+          <p:cNvPr id="2" name="Rounded Rectangle 1"/>
+          <p:cNvSpPr/>
+          <p:nvPr/>
+        </p:nvSpPr>
+        <p:spPr>
+          <a:xfrm>
+            <a:off x="0" y="0"/>
+            <a:ext cx="12191695" cy="64008"/>
+          </a:xfrm>
+          <a:prstGeom prst="roundRect">
+            <a:avLst>
+              <a:gd name="adj" fmla="val 50000"/>
+            </a:avLst>
+          </a:prstGeom>
+          <a:solidFill>
+            <a:srgbClr val="0B5E54"/>
+          </a:solidFill>
+          <a:ln>
+            <a:noFill/>
+          </a:ln>
+          <a:effectLst/>
+        </p:spPr>
+        <p:style>
+          <a:lnRef idx="1">
+            <a:schemeClr val="accent1"/>
+          </a:lnRef>
+          <a:fillRef idx="3">
+            <a:schemeClr val="accent1"/>
+          </a:fillRef>
+          <a:effectRef idx="2">
+            <a:schemeClr val="accent1"/>
+          </a:effectRef>
+          <a:fontRef idx="minor">
+            <a:schemeClr val="lt1"/>
+          </a:fontRef>
+        </p:style>
+        <p:txBody>
+          <a:bodyPr rtlCol="0" anchor="ctr"/>
+          <a:lstStyle/>
+          <a:p>
+            <a:pPr algn="ctr"/>
+          </a:p>
+        </p:txBody>
+      </p:sp>
+      <p:sp>
+        <p:nvSpPr>
+          <p:cNvPr id="3" name="TextBox 2"/>
+          <p:cNvSpPr txBox="1"/>
+          <p:nvPr/>
+        </p:nvSpPr>
+        <p:spPr>
+          <a:xfrm>
+            <a:off x="475488" y="146304"/>
+            <a:ext cx="8229600" cy="292608"/>
+          </a:xfrm>
+          <a:prstGeom prst="rect">
+            <a:avLst/>
+          </a:prstGeom>
+          <a:noFill/>
+        </p:spPr>
+        <p:txBody>
+          <a:bodyPr wrap="square" anchor="t" lIns="0" rIns="0" tIns="0" bIns="0">
+            <a:spAutoFit/>
+          </a:bodyPr>
+          <a:lstStyle/>
+          <a:p>
+            <a:pPr algn="l">
+              <a:lnSpc>
+                <a:spcPct val="114000"/>
+              </a:lnSpc>
+            </a:pPr>
+            <a:r>
+              <a:rPr sz="1100" b="1">
+                <a:solidFill>
+                  <a:srgbClr val="0B5E54"/>
+                </a:solidFill>
+              </a:rPr>
+              <a:t>工单实战 · 本次实跑结果</a:t>
+            </a:r>
+          </a:p>
+        </p:txBody>
+      </p:sp>
+      <p:sp>
+        <p:nvSpPr>
+          <p:cNvPr id="4" name="Rounded Rectangle 3"/>
+          <p:cNvSpPr/>
+          <p:nvPr/>
+        </p:nvSpPr>
+        <p:spPr>
+          <a:xfrm>
+            <a:off x="475488" y="475488"/>
+            <a:ext cx="1881187" cy="310896"/>
+          </a:xfrm>
+          <a:prstGeom prst="roundRect">
+            <a:avLst>
+              <a:gd name="adj" fmla="val 50000"/>
+            </a:avLst>
+          </a:prstGeom>
+          <a:solidFill>
+            <a:srgbClr val="C9A227"/>
+          </a:solidFill>
+          <a:ln>
+            <a:noFill/>
+          </a:ln>
+          <a:effectLst/>
+        </p:spPr>
+        <p:style>
+          <a:lnRef idx="1">
+            <a:schemeClr val="accent1"/>
+          </a:lnRef>
+          <a:fillRef idx="3">
+            <a:schemeClr val="accent1"/>
+          </a:fillRef>
+          <a:effectRef idx="2">
+            <a:schemeClr val="accent1"/>
+          </a:effectRef>
+          <a:fontRef idx="minor">
+            <a:schemeClr val="lt1"/>
+          </a:fontRef>
+        </p:style>
+        <p:txBody>
+          <a:bodyPr rtlCol="0" anchor="ctr"/>
+          <a:lstStyle/>
+          <a:p>
+            <a:pPr algn="ctr"/>
+          </a:p>
+        </p:txBody>
+      </p:sp>
+      <p:sp>
+        <p:nvSpPr>
+          <p:cNvPr id="5" name="TextBox 4"/>
+          <p:cNvSpPr txBox="1"/>
+          <p:nvPr/>
+        </p:nvSpPr>
+        <p:spPr>
+          <a:xfrm>
+            <a:off x="475488" y="475488"/>
+            <a:ext cx="1881187" cy="310896"/>
+          </a:xfrm>
+          <a:prstGeom prst="rect">
+            <a:avLst/>
+          </a:prstGeom>
+          <a:noFill/>
+        </p:spPr>
+        <p:txBody>
+          <a:bodyPr wrap="square" anchor="ctr" lIns="0" rIns="0" tIns="0" bIns="0">
+            <a:spAutoFit/>
+          </a:bodyPr>
+          <a:lstStyle/>
+          <a:p>
+            <a:pPr algn="ctr">
+              <a:lnSpc>
+                <a:spcPct val="114000"/>
+              </a:lnSpc>
+            </a:pPr>
+            <a:r>
+              <a:rPr sz="1050" b="1">
+                <a:solidFill>
+                  <a:srgbClr val="FFFFFF"/>
+                </a:solidFill>
+              </a:rPr>
+              <a:t>REAL RUN · 四档逐字实测</a:t>
+            </a:r>
+          </a:p>
+        </p:txBody>
+      </p:sp>
+      <p:sp>
+        <p:nvSpPr>
+          <p:cNvPr id="6" name="TextBox 5"/>
+          <p:cNvSpPr txBox="1"/>
+          <p:nvPr/>
+        </p:nvSpPr>
+        <p:spPr>
+          <a:xfrm>
+            <a:off x="475488" y="859536"/>
+            <a:ext cx="11237976" cy="502920"/>
+          </a:xfrm>
+          <a:prstGeom prst="rect">
+            <a:avLst/>
+          </a:prstGeom>
+          <a:noFill/>
+        </p:spPr>
+        <p:txBody>
+          <a:bodyPr wrap="square" anchor="t" lIns="0" rIns="0" tIns="0" bIns="0">
+            <a:spAutoFit/>
+          </a:bodyPr>
+          <a:lstStyle/>
+          <a:p>
+            <a:pPr algn="l">
+              <a:lnSpc>
+                <a:spcPct val="114000"/>
+              </a:lnSpc>
+            </a:pPr>
+            <a:r>
+              <a:rPr sz="2200" b="1">
+                <a:solidFill>
+                  <a:srgbClr val="1B2B28"/>
+                </a:solidFill>
+              </a:rPr>
+              <a:t>P2.1 p21_pandas_clean：本次 D/C/B/A 四档实测</a:t>
+            </a:r>
+          </a:p>
+        </p:txBody>
+      </p:sp>
+      <p:sp>
+        <p:nvSpPr>
+          <p:cNvPr id="7" name="Rounded Rectangle 6"/>
+          <p:cNvSpPr/>
+          <p:nvPr/>
+        </p:nvSpPr>
+        <p:spPr>
+          <a:xfrm>
+            <a:off x="475488" y="1389888"/>
+            <a:ext cx="1234440" cy="27432"/>
+          </a:xfrm>
+          <a:prstGeom prst="roundRect">
+            <a:avLst>
+              <a:gd name="adj" fmla="val 50000"/>
+            </a:avLst>
+          </a:prstGeom>
+          <a:solidFill>
+            <a:srgbClr val="C9A227"/>
+          </a:solidFill>
+          <a:ln>
+            <a:noFill/>
+          </a:ln>
+          <a:effectLst/>
+        </p:spPr>
+        <p:style>
+          <a:lnRef idx="1">
+            <a:schemeClr val="accent1"/>
+          </a:lnRef>
+          <a:fillRef idx="3">
+            <a:schemeClr val="accent1"/>
+          </a:fillRef>
+          <a:effectRef idx="2">
+            <a:schemeClr val="accent1"/>
+          </a:effectRef>
+          <a:fontRef idx="minor">
+            <a:schemeClr val="lt1"/>
+          </a:fontRef>
+        </p:style>
+        <p:txBody>
+          <a:bodyPr rtlCol="0" anchor="ctr"/>
+          <a:lstStyle/>
+          <a:p>
+            <a:pPr algn="ctr"/>
+          </a:p>
+        </p:txBody>
+      </p:sp>
+      <p:sp>
+        <p:nvSpPr>
+          <p:cNvPr id="8" name="Rounded Rectangle 7"/>
+          <p:cNvSpPr/>
+          <p:nvPr/>
+        </p:nvSpPr>
+        <p:spPr>
+          <a:xfrm>
+            <a:off x="475488" y="6419088"/>
+            <a:ext cx="11237976" cy="10972"/>
+          </a:xfrm>
+          <a:prstGeom prst="roundRect">
+            <a:avLst>
+              <a:gd name="adj" fmla="val 50000"/>
+            </a:avLst>
+          </a:prstGeom>
+          <a:solidFill>
+            <a:srgbClr val="E4F1EE"/>
+          </a:solidFill>
+          <a:ln>
+            <a:noFill/>
+          </a:ln>
+          <a:effectLst/>
+        </p:spPr>
+        <p:style>
+          <a:lnRef idx="1">
+            <a:schemeClr val="accent1"/>
+          </a:lnRef>
+          <a:fillRef idx="3">
+            <a:schemeClr val="accent1"/>
+          </a:fillRef>
+          <a:effectRef idx="2">
+            <a:schemeClr val="accent1"/>
+          </a:effectRef>
+          <a:fontRef idx="minor">
+            <a:schemeClr val="lt1"/>
+          </a:fontRef>
+        </p:style>
+        <p:txBody>
+          <a:bodyPr rtlCol="0" anchor="ctr"/>
+          <a:lstStyle/>
+          <a:p>
+            <a:pPr algn="ctr"/>
+          </a:p>
+        </p:txBody>
+      </p:sp>
+      <p:sp>
+        <p:nvSpPr>
+          <p:cNvPr id="9" name="TextBox 8"/>
+          <p:cNvSpPr txBox="1"/>
+          <p:nvPr/>
+        </p:nvSpPr>
+        <p:spPr>
+          <a:xfrm>
+            <a:off x="475488" y="6455664"/>
+            <a:ext cx="7315200" cy="292608"/>
+          </a:xfrm>
+          <a:prstGeom prst="rect">
+            <a:avLst/>
+          </a:prstGeom>
+          <a:noFill/>
+        </p:spPr>
+        <p:txBody>
+          <a:bodyPr wrap="square" anchor="t" lIns="0" rIns="0" tIns="0" bIns="0">
+            <a:spAutoFit/>
+          </a:bodyPr>
+          <a:lstStyle/>
+          <a:p>
+            <a:pPr algn="l">
+              <a:lnSpc>
+                <a:spcPct val="114000"/>
+              </a:lnSpc>
+            </a:pPr>
+            <a:r>
+              <a:rPr sz="900" b="0">
+                <a:solidFill>
+                  <a:srgbClr val="5C6E6A"/>
+                </a:solidFill>
+              </a:rPr>
+              <a:t>两江智造集团 · Python程序设计（项目实战）</a:t>
+            </a:r>
+          </a:p>
+        </p:txBody>
+      </p:sp>
+      <p:sp>
+        <p:nvSpPr>
+          <p:cNvPr id="10" name="TextBox 9"/>
+          <p:cNvSpPr txBox="1"/>
+          <p:nvPr/>
+        </p:nvSpPr>
+        <p:spPr>
+          <a:xfrm>
+            <a:off x="10597896" y="6537960"/>
+            <a:ext cx="996696" cy="301752"/>
+          </a:xfrm>
+          <a:prstGeom prst="rect">
+            <a:avLst/>
+          </a:prstGeom>
+          <a:noFill/>
+        </p:spPr>
+        <p:txBody>
+          <a:bodyPr wrap="square" anchor="t" lIns="0" rIns="0" tIns="0" bIns="0">
+            <a:spAutoFit/>
+          </a:bodyPr>
+          <a:lstStyle/>
+          <a:p>
+            <a:pPr algn="r">
+              <a:lnSpc>
+                <a:spcPct val="114000"/>
+              </a:lnSpc>
+            </a:pPr>
+            <a:r>
+              <a:rPr sz="1000" b="0">
+                <a:solidFill>
+                  <a:srgbClr val="8A97B5"/>
+                </a:solidFill>
+              </a:rPr>
+              <a:t>49 / 67</a:t>
+            </a:r>
+          </a:p>
+        </p:txBody>
+      </p:sp>
+      <p:sp>
+        <p:nvSpPr>
+          <p:cNvPr id="11" name="Rounded Rectangle 10"/>
+          <p:cNvSpPr/>
+          <p:nvPr/>
+        </p:nvSpPr>
+        <p:spPr>
+          <a:xfrm>
+            <a:off x="475488" y="1554480"/>
+            <a:ext cx="11237976" cy="855999"/>
+          </a:xfrm>
+          <a:prstGeom prst="roundRect">
+            <a:avLst>
+              <a:gd name="adj" fmla="val 6000"/>
+            </a:avLst>
+          </a:prstGeom>
+          <a:solidFill>
+            <a:srgbClr val="FFFFFF"/>
+          </a:solidFill>
+          <a:ln w="9525">
+            <a:solidFill>
+              <a:srgbClr val="E4F1EE"/>
+            </a:solidFill>
+          </a:ln>
+          <a:effectLst/>
+        </p:spPr>
+        <p:style>
+          <a:lnRef idx="1">
+            <a:schemeClr val="accent1"/>
+          </a:lnRef>
+          <a:fillRef idx="3">
+            <a:schemeClr val="accent1"/>
+          </a:fillRef>
+          <a:effectRef idx="2">
+            <a:schemeClr val="accent1"/>
+          </a:effectRef>
+          <a:fontRef idx="minor">
+            <a:schemeClr val="lt1"/>
+          </a:fontRef>
+        </p:style>
+        <p:txBody>
+          <a:bodyPr rtlCol="0" anchor="ctr"/>
+          <a:lstStyle/>
+          <a:p>
+            <a:pPr algn="ctr"/>
+          </a:p>
+        </p:txBody>
+      </p:sp>
+      <p:sp>
+        <p:nvSpPr>
+          <p:cNvPr id="12" name="Rounded Rectangle 11"/>
+          <p:cNvSpPr/>
+          <p:nvPr/>
+        </p:nvSpPr>
+        <p:spPr>
+          <a:xfrm>
+            <a:off x="475488" y="1554480"/>
+            <a:ext cx="54864" cy="855999"/>
+          </a:xfrm>
+          <a:prstGeom prst="roundRect">
+            <a:avLst>
+              <a:gd name="adj" fmla="val 50000"/>
+            </a:avLst>
+          </a:prstGeom>
+          <a:solidFill>
+            <a:srgbClr val="5C6E6A"/>
+          </a:solidFill>
+          <a:ln>
+            <a:noFill/>
+          </a:ln>
+          <a:effectLst/>
+        </p:spPr>
+        <p:style>
+          <a:lnRef idx="1">
+            <a:schemeClr val="accent1"/>
+          </a:lnRef>
+          <a:fillRef idx="3">
+            <a:schemeClr val="accent1"/>
+          </a:fillRef>
+          <a:effectRef idx="2">
+            <a:schemeClr val="accent1"/>
+          </a:effectRef>
+          <a:fontRef idx="minor">
+            <a:schemeClr val="lt1"/>
+          </a:fontRef>
+        </p:style>
+        <p:txBody>
+          <a:bodyPr rtlCol="0" anchor="ctr"/>
+          <a:lstStyle/>
+          <a:p>
+            <a:pPr algn="ctr"/>
+          </a:p>
+        </p:txBody>
+      </p:sp>
+      <p:sp>
+        <p:nvSpPr>
+          <p:cNvPr id="13" name="Rounded Rectangle 12"/>
+          <p:cNvSpPr/>
+          <p:nvPr/>
+        </p:nvSpPr>
+        <p:spPr>
+          <a:xfrm>
+            <a:off x="621792" y="1636776"/>
+            <a:ext cx="237744" cy="237744"/>
+          </a:xfrm>
+          <a:prstGeom prst="roundRect">
+            <a:avLst>
+              <a:gd name="adj" fmla="val 28000"/>
+            </a:avLst>
+          </a:prstGeom>
+          <a:solidFill>
+            <a:srgbClr val="5C6E6A"/>
+          </a:solidFill>
+          <a:ln>
+            <a:noFill/>
+          </a:ln>
+          <a:effectLst/>
+        </p:spPr>
+        <p:style>
+          <a:lnRef idx="1">
+            <a:schemeClr val="accent1"/>
+          </a:lnRef>
+          <a:fillRef idx="3">
+            <a:schemeClr val="accent1"/>
+          </a:fillRef>
+          <a:effectRef idx="2">
+            <a:schemeClr val="accent1"/>
+          </a:effectRef>
+          <a:fontRef idx="minor">
+            <a:schemeClr val="lt1"/>
+          </a:fontRef>
+        </p:style>
+        <p:txBody>
+          <a:bodyPr rtlCol="0" anchor="ctr"/>
+          <a:lstStyle/>
+          <a:p>
+            <a:pPr algn="ctr"/>
+          </a:p>
+        </p:txBody>
+      </p:sp>
+      <p:sp>
+        <p:nvSpPr>
+          <p:cNvPr id="14" name="TextBox 13"/>
+          <p:cNvSpPr txBox="1"/>
+          <p:nvPr/>
+        </p:nvSpPr>
+        <p:spPr>
+          <a:xfrm>
+            <a:off x="621792" y="1636776"/>
+            <a:ext cx="237744" cy="237744"/>
+          </a:xfrm>
+          <a:prstGeom prst="rect">
+            <a:avLst/>
+          </a:prstGeom>
+          <a:noFill/>
+        </p:spPr>
+        <p:txBody>
+          <a:bodyPr wrap="square" anchor="ctr" lIns="0" rIns="0" tIns="0" bIns="0">
+            <a:spAutoFit/>
+          </a:bodyPr>
+          <a:lstStyle/>
+          <a:p>
+            <a:pPr algn="ctr">
+              <a:lnSpc>
+                <a:spcPct val="114000"/>
+              </a:lnSpc>
+            </a:pPr>
+            <a:r>
+              <a:rPr sz="1000" b="1">
+                <a:solidFill>
+                  <a:srgbClr val="FFFFFF"/>
+                </a:solidFill>
+              </a:rPr>
+              <a:t>D</a:t>
+            </a:r>
+          </a:p>
+        </p:txBody>
+      </p:sp>
+      <p:sp>
+        <p:nvSpPr>
+          <p:cNvPr id="15" name="TextBox 14"/>
+          <p:cNvSpPr txBox="1"/>
+          <p:nvPr/>
+        </p:nvSpPr>
+        <p:spPr>
+          <a:xfrm>
+            <a:off x="932688" y="1618488"/>
+            <a:ext cx="8778240" cy="274320"/>
+          </a:xfrm>
+          <a:prstGeom prst="rect">
+            <a:avLst/>
+          </a:prstGeom>
+          <a:noFill/>
+        </p:spPr>
+        <p:txBody>
+          <a:bodyPr wrap="square" anchor="ctr" lIns="0" rIns="0" tIns="0" bIns="0">
+            <a:spAutoFit/>
+          </a:bodyPr>
+          <a:lstStyle/>
+          <a:p>
+            <a:pPr algn="l">
+              <a:lnSpc>
+                <a:spcPct val="114000"/>
+              </a:lnSpc>
+            </a:pPr>
+            <a:r>
+              <a:rPr sz="1050" b="1">
+                <a:solidFill>
+                  <a:srgbClr val="1B2B28"/>
+                </a:solidFill>
+              </a:rPr>
+              <a:t>及格</a:t>
+            </a:r>
+            <a:r>
+              <a:rPr sz="850" b="0">
+                <a:solidFill>
+                  <a:srgbClr val="5C6E6A"/>
+                </a:solidFill>
+              </a:rPr>
+              <a:t>   验收口径：</a:t>
+            </a:r>
+            <a:r>
+              <a:rPr sz="850" b="0">
+                <a:solidFill>
+                  <a:srgbClr val="5C6E6A"/>
+                </a:solidFill>
+              </a:rPr>
+              <a:t>管道完整；质量≥85%；PEP 8≥75%</a:t>
+            </a:r>
+          </a:p>
+        </p:txBody>
+      </p:sp>
+      <p:sp>
+        <p:nvSpPr>
+          <p:cNvPr id="16" name="Rounded Rectangle 15"/>
+          <p:cNvSpPr/>
+          <p:nvPr/>
+        </p:nvSpPr>
+        <p:spPr>
+          <a:xfrm>
+            <a:off x="11131803" y="1645920"/>
+            <a:ext cx="453644" cy="237744"/>
+          </a:xfrm>
+          <a:prstGeom prst="roundRect">
+            <a:avLst>
+              <a:gd name="adj" fmla="val 50000"/>
+            </a:avLst>
+          </a:prstGeom>
+          <a:solidFill>
+            <a:srgbClr val="0B5E54"/>
+          </a:solidFill>
+          <a:ln>
+            <a:noFill/>
+          </a:ln>
+          <a:effectLst/>
+        </p:spPr>
+        <p:style>
+          <a:lnRef idx="1">
+            <a:schemeClr val="accent1"/>
+          </a:lnRef>
+          <a:fillRef idx="3">
+            <a:schemeClr val="accent1"/>
+          </a:fillRef>
+          <a:effectRef idx="2">
+            <a:schemeClr val="accent1"/>
+          </a:effectRef>
+          <a:fontRef idx="minor">
+            <a:schemeClr val="lt1"/>
+          </a:fontRef>
+        </p:style>
+        <p:txBody>
+          <a:bodyPr rtlCol="0" anchor="ctr"/>
+          <a:lstStyle/>
+          <a:p>
+            <a:pPr algn="ctr"/>
+          </a:p>
+        </p:txBody>
+      </p:sp>
+      <p:sp>
+        <p:nvSpPr>
+          <p:cNvPr id="17" name="TextBox 16"/>
+          <p:cNvSpPr txBox="1"/>
+          <p:nvPr/>
+        </p:nvSpPr>
+        <p:spPr>
+          <a:xfrm>
+            <a:off x="11131803" y="1645920"/>
+            <a:ext cx="453644" cy="237744"/>
+          </a:xfrm>
+          <a:prstGeom prst="rect">
+            <a:avLst/>
+          </a:prstGeom>
+          <a:noFill/>
+        </p:spPr>
+        <p:txBody>
+          <a:bodyPr wrap="square" anchor="ctr" lIns="0" rIns="0" tIns="0" bIns="0">
+            <a:spAutoFit/>
+          </a:bodyPr>
+          <a:lstStyle/>
+          <a:p>
+            <a:pPr algn="ctr">
+              <a:lnSpc>
+                <a:spcPct val="114000"/>
+              </a:lnSpc>
+            </a:pPr>
+            <a:r>
+              <a:rPr sz="850" b="1">
+                <a:solidFill>
+                  <a:srgbClr val="FFFFFF"/>
+                </a:solidFill>
+              </a:rPr>
+              <a:t>达标</a:t>
+            </a:r>
+          </a:p>
+        </p:txBody>
+      </p:sp>
+      <p:sp>
+        <p:nvSpPr>
+          <p:cNvPr id="18" name="TextBox 17"/>
+          <p:cNvSpPr txBox="1"/>
+          <p:nvPr/>
+        </p:nvSpPr>
+        <p:spPr>
+          <a:xfrm>
+            <a:off x="932688" y="1901952"/>
+            <a:ext cx="10671047" cy="453663"/>
+          </a:xfrm>
+          <a:prstGeom prst="rect">
+            <a:avLst/>
+          </a:prstGeom>
+          <a:noFill/>
+        </p:spPr>
+        <p:txBody>
+          <a:bodyPr wrap="square" anchor="t" lIns="0" rIns="0" tIns="0" bIns="0">
+            <a:spAutoFit/>
+          </a:bodyPr>
+          <a:lstStyle/>
+          <a:p>
+            <a:pPr algn="l">
+              <a:lnSpc>
+                <a:spcPct val="114000"/>
+              </a:lnSpc>
+            </a:pPr>
+            <a:r>
+              <a:rPr sz="950" b="0">
+                <a:solidFill>
+                  <a:srgbClr val="1B2B28"/>
+                </a:solidFill>
+              </a:rPr>
+              <a:t>七步管道 8/8 条台账留痕 1206→1186 行｜质量 100.0 ≥ 85｜PEP 8 子集 96.0%（2586/2695 项）≥ 75.0%</a:t>
+            </a:r>
+          </a:p>
+        </p:txBody>
+      </p:sp>
+      <p:sp>
+        <p:nvSpPr>
+          <p:cNvPr id="19" name="Rounded Rectangle 18"/>
+          <p:cNvSpPr/>
+          <p:nvPr/>
+        </p:nvSpPr>
+        <p:spPr>
+          <a:xfrm>
+            <a:off x="475488" y="2474487"/>
+            <a:ext cx="11237976" cy="855999"/>
+          </a:xfrm>
+          <a:prstGeom prst="roundRect">
+            <a:avLst>
+              <a:gd name="adj" fmla="val 6000"/>
+            </a:avLst>
+          </a:prstGeom>
+          <a:solidFill>
+            <a:srgbClr val="FFFFFF"/>
+          </a:solidFill>
+          <a:ln w="9525">
+            <a:solidFill>
+              <a:srgbClr val="E4F1EE"/>
+            </a:solidFill>
+          </a:ln>
+          <a:effectLst/>
+        </p:spPr>
+        <p:style>
+          <a:lnRef idx="1">
+            <a:schemeClr val="accent1"/>
+          </a:lnRef>
+          <a:fillRef idx="3">
+            <a:schemeClr val="accent1"/>
+          </a:fillRef>
+          <a:effectRef idx="2">
+            <a:schemeClr val="accent1"/>
+          </a:effectRef>
+          <a:fontRef idx="minor">
+            <a:schemeClr val="lt1"/>
+          </a:fontRef>
+        </p:style>
+        <p:txBody>
+          <a:bodyPr rtlCol="0" anchor="ctr"/>
+          <a:lstStyle/>
+          <a:p>
+            <a:pPr algn="ctr"/>
+          </a:p>
+        </p:txBody>
+      </p:sp>
+      <p:sp>
+        <p:nvSpPr>
+          <p:cNvPr id="20" name="Rounded Rectangle 19"/>
+          <p:cNvSpPr/>
+          <p:nvPr/>
+        </p:nvSpPr>
+        <p:spPr>
+          <a:xfrm>
+            <a:off x="475488" y="2474487"/>
+            <a:ext cx="54864" cy="855999"/>
+          </a:xfrm>
+          <a:prstGeom prst="roundRect">
+            <a:avLst>
+              <a:gd name="adj" fmla="val 50000"/>
+            </a:avLst>
+          </a:prstGeom>
+          <a:solidFill>
+            <a:srgbClr val="157A6D"/>
+          </a:solidFill>
+          <a:ln>
+            <a:noFill/>
+          </a:ln>
+          <a:effectLst/>
+        </p:spPr>
+        <p:style>
+          <a:lnRef idx="1">
+            <a:schemeClr val="accent1"/>
+          </a:lnRef>
+          <a:fillRef idx="3">
+            <a:schemeClr val="accent1"/>
+          </a:fillRef>
+          <a:effectRef idx="2">
+            <a:schemeClr val="accent1"/>
+          </a:effectRef>
+          <a:fontRef idx="minor">
+            <a:schemeClr val="lt1"/>
+          </a:fontRef>
+        </p:style>
+        <p:txBody>
+          <a:bodyPr rtlCol="0" anchor="ctr"/>
+          <a:lstStyle/>
+          <a:p>
+            <a:pPr algn="ctr"/>
+          </a:p>
+        </p:txBody>
+      </p:sp>
+      <p:sp>
+        <p:nvSpPr>
+          <p:cNvPr id="21" name="Rounded Rectangle 20"/>
+          <p:cNvSpPr/>
+          <p:nvPr/>
+        </p:nvSpPr>
+        <p:spPr>
+          <a:xfrm>
+            <a:off x="621792" y="2556783"/>
+            <a:ext cx="237744" cy="237744"/>
+          </a:xfrm>
+          <a:prstGeom prst="roundRect">
+            <a:avLst>
+              <a:gd name="adj" fmla="val 28000"/>
+            </a:avLst>
+          </a:prstGeom>
+          <a:solidFill>
+            <a:srgbClr val="157A6D"/>
+          </a:solidFill>
+          <a:ln>
+            <a:noFill/>
+          </a:ln>
+          <a:effectLst/>
+        </p:spPr>
+        <p:style>
+          <a:lnRef idx="1">
+            <a:schemeClr val="accent1"/>
+          </a:lnRef>
+          <a:fillRef idx="3">
+            <a:schemeClr val="accent1"/>
+          </a:fillRef>
+          <a:effectRef idx="2">
+            <a:schemeClr val="accent1"/>
+          </a:effectRef>
+          <a:fontRef idx="minor">
+            <a:schemeClr val="lt1"/>
+          </a:fontRef>
+        </p:style>
+        <p:txBody>
+          <a:bodyPr rtlCol="0" anchor="ctr"/>
+          <a:lstStyle/>
+          <a:p>
+            <a:pPr algn="ctr"/>
+          </a:p>
+        </p:txBody>
+      </p:sp>
+      <p:sp>
+        <p:nvSpPr>
+          <p:cNvPr id="22" name="TextBox 21"/>
+          <p:cNvSpPr txBox="1"/>
+          <p:nvPr/>
+        </p:nvSpPr>
+        <p:spPr>
+          <a:xfrm>
+            <a:off x="621792" y="2556783"/>
+            <a:ext cx="237744" cy="237744"/>
+          </a:xfrm>
+          <a:prstGeom prst="rect">
+            <a:avLst/>
+          </a:prstGeom>
+          <a:noFill/>
+        </p:spPr>
+        <p:txBody>
+          <a:bodyPr wrap="square" anchor="ctr" lIns="0" rIns="0" tIns="0" bIns="0">
+            <a:spAutoFit/>
+          </a:bodyPr>
+          <a:lstStyle/>
+          <a:p>
+            <a:pPr algn="ctr">
+              <a:lnSpc>
+                <a:spcPct val="114000"/>
+              </a:lnSpc>
+            </a:pPr>
+            <a:r>
+              <a:rPr sz="1000" b="1">
+                <a:solidFill>
+                  <a:srgbClr val="FFFFFF"/>
+                </a:solidFill>
+              </a:rPr>
+              <a:t>C</a:t>
+            </a:r>
+          </a:p>
+        </p:txBody>
+      </p:sp>
+      <p:sp>
+        <p:nvSpPr>
+          <p:cNvPr id="23" name="TextBox 22"/>
+          <p:cNvSpPr txBox="1"/>
+          <p:nvPr/>
+        </p:nvSpPr>
+        <p:spPr>
+          <a:xfrm>
+            <a:off x="932688" y="2538495"/>
+            <a:ext cx="8778240" cy="274320"/>
+          </a:xfrm>
+          <a:prstGeom prst="rect">
+            <a:avLst/>
+          </a:prstGeom>
+          <a:noFill/>
+        </p:spPr>
+        <p:txBody>
+          <a:bodyPr wrap="square" anchor="ctr" lIns="0" rIns="0" tIns="0" bIns="0">
+            <a:spAutoFit/>
+          </a:bodyPr>
+          <a:lstStyle/>
+          <a:p>
+            <a:pPr algn="l">
+              <a:lnSpc>
+                <a:spcPct val="114000"/>
+              </a:lnSpc>
+            </a:pPr>
+            <a:r>
+              <a:rPr sz="1050" b="1">
+                <a:solidFill>
+                  <a:srgbClr val="1B2B28"/>
+                </a:solidFill>
+              </a:rPr>
+              <a:t>良好</a:t>
+            </a:r>
+            <a:r>
+              <a:rPr sz="850" b="0">
+                <a:solidFill>
+                  <a:srgbClr val="5C6E6A"/>
+                </a:solidFill>
+              </a:rPr>
+              <a:t>   验收口径：</a:t>
+            </a:r>
+            <a:r>
+              <a:rPr sz="850" b="0">
+                <a:solidFill>
+                  <a:srgbClr val="5C6E6A"/>
+                </a:solidFill>
+              </a:rPr>
+              <a:t>质量≥88%；处理日志可复现</a:t>
+            </a:r>
+          </a:p>
+        </p:txBody>
+      </p:sp>
+      <p:sp>
+        <p:nvSpPr>
+          <p:cNvPr id="24" name="Rounded Rectangle 23"/>
+          <p:cNvSpPr/>
+          <p:nvPr/>
+        </p:nvSpPr>
+        <p:spPr>
+          <a:xfrm>
+            <a:off x="11131803" y="2565927"/>
+            <a:ext cx="453644" cy="237744"/>
+          </a:xfrm>
+          <a:prstGeom prst="roundRect">
+            <a:avLst>
+              <a:gd name="adj" fmla="val 50000"/>
+            </a:avLst>
+          </a:prstGeom>
+          <a:solidFill>
+            <a:srgbClr val="0B5E54"/>
+          </a:solidFill>
+          <a:ln>
+            <a:noFill/>
+          </a:ln>
+          <a:effectLst/>
+        </p:spPr>
+        <p:style>
+          <a:lnRef idx="1">
+            <a:schemeClr val="accent1"/>
+          </a:lnRef>
+          <a:fillRef idx="3">
+            <a:schemeClr val="accent1"/>
+          </a:fillRef>
+          <a:effectRef idx="2">
+            <a:schemeClr val="accent1"/>
+          </a:effectRef>
+          <a:fontRef idx="minor">
+            <a:schemeClr val="lt1"/>
+          </a:fontRef>
+        </p:style>
+        <p:txBody>
+          <a:bodyPr rtlCol="0" anchor="ctr"/>
+          <a:lstStyle/>
+          <a:p>
+            <a:pPr algn="ctr"/>
+          </a:p>
+        </p:txBody>
+      </p:sp>
+      <p:sp>
+        <p:nvSpPr>
+          <p:cNvPr id="25" name="TextBox 24"/>
+          <p:cNvSpPr txBox="1"/>
+          <p:nvPr/>
+        </p:nvSpPr>
+        <p:spPr>
+          <a:xfrm>
+            <a:off x="11131803" y="2565927"/>
+            <a:ext cx="453644" cy="237744"/>
+          </a:xfrm>
+          <a:prstGeom prst="rect">
+            <a:avLst/>
+          </a:prstGeom>
+          <a:noFill/>
+        </p:spPr>
+        <p:txBody>
+          <a:bodyPr wrap="square" anchor="ctr" lIns="0" rIns="0" tIns="0" bIns="0">
+            <a:spAutoFit/>
+          </a:bodyPr>
+          <a:lstStyle/>
+          <a:p>
+            <a:pPr algn="ctr">
+              <a:lnSpc>
+                <a:spcPct val="114000"/>
+              </a:lnSpc>
+            </a:pPr>
+            <a:r>
+              <a:rPr sz="850" b="1">
+                <a:solidFill>
+                  <a:srgbClr val="FFFFFF"/>
+                </a:solidFill>
+              </a:rPr>
+              <a:t>达标</a:t>
+            </a:r>
+          </a:p>
+        </p:txBody>
+      </p:sp>
+      <p:sp>
+        <p:nvSpPr>
+          <p:cNvPr id="26" name="TextBox 25"/>
+          <p:cNvSpPr txBox="1"/>
+          <p:nvPr/>
+        </p:nvSpPr>
+        <p:spPr>
+          <a:xfrm>
+            <a:off x="932688" y="2821959"/>
+            <a:ext cx="10671047" cy="453663"/>
+          </a:xfrm>
+          <a:prstGeom prst="rect">
+            <a:avLst/>
+          </a:prstGeom>
+          <a:noFill/>
+        </p:spPr>
+        <p:txBody>
+          <a:bodyPr wrap="square" anchor="t" lIns="0" rIns="0" tIns="0" bIns="0">
+            <a:spAutoFit/>
+          </a:bodyPr>
+          <a:lstStyle/>
+          <a:p>
+            <a:pPr algn="l">
+              <a:lnSpc>
+                <a:spcPct val="114000"/>
+              </a:lnSpc>
+            </a:pPr>
+            <a:r>
+              <a:rPr sz="950" b="0">
+                <a:solidFill>
+                  <a:srgbClr val="1B2B28"/>
+                </a:solidFill>
+              </a:rPr>
+              <a:t>质量 100.0 ≥ 88｜同进程二次运行同一输入：8/8 步行数增量一致、clean_log 文本逐字节一致（台账 70 行，output/clean_log.txt，无时间戳）</a:t>
+            </a:r>
+          </a:p>
+        </p:txBody>
+      </p:sp>
+      <p:sp>
+        <p:nvSpPr>
+          <p:cNvPr id="27" name="Rounded Rectangle 26"/>
+          <p:cNvSpPr/>
+          <p:nvPr/>
+        </p:nvSpPr>
+        <p:spPr>
+          <a:xfrm>
+            <a:off x="475488" y="3394494"/>
+            <a:ext cx="11237976" cy="855999"/>
+          </a:xfrm>
+          <a:prstGeom prst="roundRect">
+            <a:avLst>
+              <a:gd name="adj" fmla="val 6000"/>
+            </a:avLst>
+          </a:prstGeom>
+          <a:solidFill>
+            <a:srgbClr val="FFFFFF"/>
+          </a:solidFill>
+          <a:ln w="9525">
+            <a:solidFill>
+              <a:srgbClr val="E4F1EE"/>
+            </a:solidFill>
+          </a:ln>
+          <a:effectLst/>
+        </p:spPr>
+        <p:style>
+          <a:lnRef idx="1">
+            <a:schemeClr val="accent1"/>
+          </a:lnRef>
+          <a:fillRef idx="3">
+            <a:schemeClr val="accent1"/>
+          </a:fillRef>
+          <a:effectRef idx="2">
+            <a:schemeClr val="accent1"/>
+          </a:effectRef>
+          <a:fontRef idx="minor">
+            <a:schemeClr val="lt1"/>
+          </a:fontRef>
+        </p:style>
+        <p:txBody>
+          <a:bodyPr rtlCol="0" anchor="ctr"/>
+          <a:lstStyle/>
+          <a:p>
+            <a:pPr algn="ctr"/>
+          </a:p>
+        </p:txBody>
+      </p:sp>
+      <p:sp>
+        <p:nvSpPr>
+          <p:cNvPr id="28" name="Rounded Rectangle 27"/>
+          <p:cNvSpPr/>
+          <p:nvPr/>
+        </p:nvSpPr>
+        <p:spPr>
+          <a:xfrm>
+            <a:off x="475488" y="3394494"/>
+            <a:ext cx="54864" cy="855999"/>
+          </a:xfrm>
+          <a:prstGeom prst="roundRect">
+            <a:avLst>
+              <a:gd name="adj" fmla="val 50000"/>
+            </a:avLst>
+          </a:prstGeom>
+          <a:solidFill>
+            <a:srgbClr val="0B5E54"/>
+          </a:solidFill>
+          <a:ln>
+            <a:noFill/>
+          </a:ln>
+          <a:effectLst/>
+        </p:spPr>
+        <p:style>
+          <a:lnRef idx="1">
+            <a:schemeClr val="accent1"/>
+          </a:lnRef>
+          <a:fillRef idx="3">
+            <a:schemeClr val="accent1"/>
+          </a:fillRef>
+          <a:effectRef idx="2">
+            <a:schemeClr val="accent1"/>
+          </a:effectRef>
+          <a:fontRef idx="minor">
+            <a:schemeClr val="lt1"/>
+          </a:fontRef>
+        </p:style>
+        <p:txBody>
+          <a:bodyPr rtlCol="0" anchor="ctr"/>
+          <a:lstStyle/>
+          <a:p>
+            <a:pPr algn="ctr"/>
+          </a:p>
+        </p:txBody>
+      </p:sp>
+      <p:sp>
+        <p:nvSpPr>
+          <p:cNvPr id="29" name="Rounded Rectangle 28"/>
+          <p:cNvSpPr/>
+          <p:nvPr/>
+        </p:nvSpPr>
+        <p:spPr>
+          <a:xfrm>
+            <a:off x="621792" y="3476790"/>
+            <a:ext cx="237744" cy="237744"/>
+          </a:xfrm>
+          <a:prstGeom prst="roundRect">
+            <a:avLst>
+              <a:gd name="adj" fmla="val 28000"/>
+            </a:avLst>
+          </a:prstGeom>
+          <a:solidFill>
+            <a:srgbClr val="0B5E54"/>
+          </a:solidFill>
+          <a:ln>
+            <a:noFill/>
+          </a:ln>
+          <a:effectLst/>
+        </p:spPr>
+        <p:style>
+          <a:lnRef idx="1">
+            <a:schemeClr val="accent1"/>
+          </a:lnRef>
+          <a:fillRef idx="3">
+            <a:schemeClr val="accent1"/>
+          </a:fillRef>
+          <a:effectRef idx="2">
+            <a:schemeClr val="accent1"/>
+          </a:effectRef>
+          <a:fontRef idx="minor">
+            <a:schemeClr val="lt1"/>
+          </a:fontRef>
+        </p:style>
+        <p:txBody>
+          <a:bodyPr rtlCol="0" anchor="ctr"/>
+          <a:lstStyle/>
+          <a:p>
+            <a:pPr algn="ctr"/>
+          </a:p>
+        </p:txBody>
+      </p:sp>
+      <p:sp>
+        <p:nvSpPr>
+          <p:cNvPr id="30" name="TextBox 29"/>
+          <p:cNvSpPr txBox="1"/>
+          <p:nvPr/>
+        </p:nvSpPr>
+        <p:spPr>
+          <a:xfrm>
+            <a:off x="621792" y="3476790"/>
+            <a:ext cx="237744" cy="237744"/>
+          </a:xfrm>
+          <a:prstGeom prst="rect">
+            <a:avLst/>
+          </a:prstGeom>
+          <a:noFill/>
+        </p:spPr>
+        <p:txBody>
+          <a:bodyPr wrap="square" anchor="ctr" lIns="0" rIns="0" tIns="0" bIns="0">
+            <a:spAutoFit/>
+          </a:bodyPr>
+          <a:lstStyle/>
+          <a:p>
+            <a:pPr algn="ctr">
+              <a:lnSpc>
+                <a:spcPct val="114000"/>
+              </a:lnSpc>
+            </a:pPr>
+            <a:r>
+              <a:rPr sz="1000" b="1">
+                <a:solidFill>
+                  <a:srgbClr val="FFFFFF"/>
+                </a:solidFill>
+              </a:rPr>
+              <a:t>B</a:t>
+            </a:r>
+          </a:p>
+        </p:txBody>
+      </p:sp>
+      <p:sp>
+        <p:nvSpPr>
+          <p:cNvPr id="31" name="TextBox 30"/>
+          <p:cNvSpPr txBox="1"/>
+          <p:nvPr/>
+        </p:nvSpPr>
+        <p:spPr>
+          <a:xfrm>
+            <a:off x="932688" y="3458502"/>
+            <a:ext cx="8778240" cy="274320"/>
+          </a:xfrm>
+          <a:prstGeom prst="rect">
+            <a:avLst/>
+          </a:prstGeom>
+          <a:noFill/>
+        </p:spPr>
+        <p:txBody>
+          <a:bodyPr wrap="square" anchor="ctr" lIns="0" rIns="0" tIns="0" bIns="0">
+            <a:spAutoFit/>
+          </a:bodyPr>
+          <a:lstStyle/>
+          <a:p>
+            <a:pPr algn="l">
+              <a:lnSpc>
+                <a:spcPct val="114000"/>
+              </a:lnSpc>
+            </a:pPr>
+            <a:r>
+              <a:rPr sz="1050" b="1">
+                <a:solidFill>
+                  <a:srgbClr val="1B2B28"/>
+                </a:solidFill>
+              </a:rPr>
+              <a:t>优秀</a:t>
+            </a:r>
+            <a:r>
+              <a:rPr sz="850" b="0">
+                <a:solidFill>
+                  <a:srgbClr val="5C6E6A"/>
+                </a:solidFill>
+              </a:rPr>
+              <a:t>   验收口径：</a:t>
+            </a:r>
+            <a:r>
+              <a:rPr sz="850" b="0">
+                <a:solidFill>
+                  <a:srgbClr val="5C6E6A"/>
+                </a:solidFill>
+              </a:rPr>
+              <a:t>质量≥90%；PEP 8≥85%；文档含使用示例</a:t>
+            </a:r>
+          </a:p>
+        </p:txBody>
+      </p:sp>
+      <p:sp>
+        <p:nvSpPr>
+          <p:cNvPr id="32" name="Rounded Rectangle 31"/>
+          <p:cNvSpPr/>
+          <p:nvPr/>
+        </p:nvSpPr>
+        <p:spPr>
+          <a:xfrm>
+            <a:off x="11131803" y="3485934"/>
+            <a:ext cx="453644" cy="237744"/>
+          </a:xfrm>
+          <a:prstGeom prst="roundRect">
+            <a:avLst>
+              <a:gd name="adj" fmla="val 50000"/>
+            </a:avLst>
+          </a:prstGeom>
+          <a:solidFill>
+            <a:srgbClr val="0B5E54"/>
+          </a:solidFill>
+          <a:ln>
+            <a:noFill/>
+          </a:ln>
+          <a:effectLst/>
+        </p:spPr>
+        <p:style>
+          <a:lnRef idx="1">
+            <a:schemeClr val="accent1"/>
+          </a:lnRef>
+          <a:fillRef idx="3">
+            <a:schemeClr val="accent1"/>
+          </a:fillRef>
+          <a:effectRef idx="2">
+            <a:schemeClr val="accent1"/>
+          </a:effectRef>
+          <a:fontRef idx="minor">
+            <a:schemeClr val="lt1"/>
+          </a:fontRef>
+        </p:style>
+        <p:txBody>
+          <a:bodyPr rtlCol="0" anchor="ctr"/>
+          <a:lstStyle/>
+          <a:p>
+            <a:pPr algn="ctr"/>
+          </a:p>
+        </p:txBody>
+      </p:sp>
+      <p:sp>
+        <p:nvSpPr>
+          <p:cNvPr id="33" name="TextBox 32"/>
+          <p:cNvSpPr txBox="1"/>
+          <p:nvPr/>
+        </p:nvSpPr>
+        <p:spPr>
+          <a:xfrm>
+            <a:off x="11131803" y="3485934"/>
+            <a:ext cx="453644" cy="237744"/>
+          </a:xfrm>
+          <a:prstGeom prst="rect">
+            <a:avLst/>
+          </a:prstGeom>
+          <a:noFill/>
+        </p:spPr>
+        <p:txBody>
+          <a:bodyPr wrap="square" anchor="ctr" lIns="0" rIns="0" tIns="0" bIns="0">
+            <a:spAutoFit/>
+          </a:bodyPr>
+          <a:lstStyle/>
+          <a:p>
+            <a:pPr algn="ctr">
+              <a:lnSpc>
+                <a:spcPct val="114000"/>
+              </a:lnSpc>
+            </a:pPr>
+            <a:r>
+              <a:rPr sz="850" b="1">
+                <a:solidFill>
+                  <a:srgbClr val="FFFFFF"/>
+                </a:solidFill>
+              </a:rPr>
+              <a:t>达标</a:t>
+            </a:r>
+          </a:p>
+        </p:txBody>
+      </p:sp>
+      <p:sp>
+        <p:nvSpPr>
+          <p:cNvPr id="34" name="TextBox 33"/>
+          <p:cNvSpPr txBox="1"/>
+          <p:nvPr/>
+        </p:nvSpPr>
+        <p:spPr>
+          <a:xfrm>
+            <a:off x="932688" y="3741966"/>
+            <a:ext cx="10671047" cy="453663"/>
+          </a:xfrm>
+          <a:prstGeom prst="rect">
+            <a:avLst/>
+          </a:prstGeom>
+          <a:noFill/>
+        </p:spPr>
+        <p:txBody>
+          <a:bodyPr wrap="square" anchor="t" lIns="0" rIns="0" tIns="0" bIns="0">
+            <a:spAutoFit/>
+          </a:bodyPr>
+          <a:lstStyle/>
+          <a:p>
+            <a:pPr algn="l">
+              <a:lnSpc>
+                <a:spcPct val="114000"/>
+              </a:lnSpc>
+            </a:pPr>
+            <a:r>
+              <a:rPr sz="950" b="0">
+                <a:solidFill>
+                  <a:srgbClr val="1B2B28"/>
+                </a:solidFill>
+              </a:rPr>
+              <a:t>质量 100.0 ≥ 90｜PEP 8 子集 96.0% ≥ 85.0%｜使用示例 README.md:83（由 tests 逐字执行，防文案腐烂）</a:t>
+            </a:r>
+          </a:p>
+        </p:txBody>
+      </p:sp>
+      <p:sp>
+        <p:nvSpPr>
+          <p:cNvPr id="35" name="Rounded Rectangle 34"/>
+          <p:cNvSpPr/>
+          <p:nvPr/>
+        </p:nvSpPr>
+        <p:spPr>
+          <a:xfrm>
+            <a:off x="475488" y="4314502"/>
+            <a:ext cx="11237976" cy="1098745"/>
+          </a:xfrm>
+          <a:prstGeom prst="roundRect">
+            <a:avLst>
+              <a:gd name="adj" fmla="val 6000"/>
+            </a:avLst>
+          </a:prstGeom>
+          <a:solidFill>
+            <a:srgbClr val="FFFFFF"/>
+          </a:solidFill>
+          <a:ln w="9525">
+            <a:solidFill>
+              <a:srgbClr val="E4F1EE"/>
+            </a:solidFill>
+          </a:ln>
+          <a:effectLst/>
+        </p:spPr>
+        <p:style>
+          <a:lnRef idx="1">
+            <a:schemeClr val="accent1"/>
+          </a:lnRef>
+          <a:fillRef idx="3">
+            <a:schemeClr val="accent1"/>
+          </a:fillRef>
+          <a:effectRef idx="2">
+            <a:schemeClr val="accent1"/>
+          </a:effectRef>
+          <a:fontRef idx="minor">
+            <a:schemeClr val="lt1"/>
+          </a:fontRef>
+        </p:style>
+        <p:txBody>
+          <a:bodyPr rtlCol="0" anchor="ctr"/>
+          <a:lstStyle/>
+          <a:p>
+            <a:pPr algn="ctr"/>
+          </a:p>
+        </p:txBody>
+      </p:sp>
+      <p:sp>
+        <p:nvSpPr>
+          <p:cNvPr id="36" name="Rounded Rectangle 35"/>
+          <p:cNvSpPr/>
+          <p:nvPr/>
+        </p:nvSpPr>
+        <p:spPr>
+          <a:xfrm>
+            <a:off x="475488" y="4314502"/>
+            <a:ext cx="54864" cy="1098745"/>
+          </a:xfrm>
+          <a:prstGeom prst="roundRect">
+            <a:avLst>
+              <a:gd name="adj" fmla="val 50000"/>
+            </a:avLst>
+          </a:prstGeom>
+          <a:solidFill>
+            <a:srgbClr val="C9A227"/>
+          </a:solidFill>
+          <a:ln>
+            <a:noFill/>
+          </a:ln>
+          <a:effectLst/>
+        </p:spPr>
+        <p:style>
+          <a:lnRef idx="1">
+            <a:schemeClr val="accent1"/>
+          </a:lnRef>
+          <a:fillRef idx="3">
+            <a:schemeClr val="accent1"/>
+          </a:fillRef>
+          <a:effectRef idx="2">
+            <a:schemeClr val="accent1"/>
+          </a:effectRef>
+          <a:fontRef idx="minor">
+            <a:schemeClr val="lt1"/>
+          </a:fontRef>
+        </p:style>
+        <p:txBody>
+          <a:bodyPr rtlCol="0" anchor="ctr"/>
+          <a:lstStyle/>
+          <a:p>
+            <a:pPr algn="ctr"/>
+          </a:p>
+        </p:txBody>
+      </p:sp>
+      <p:sp>
+        <p:nvSpPr>
+          <p:cNvPr id="37" name="Rounded Rectangle 36"/>
+          <p:cNvSpPr/>
+          <p:nvPr/>
+        </p:nvSpPr>
+        <p:spPr>
+          <a:xfrm>
+            <a:off x="621792" y="4396798"/>
+            <a:ext cx="237744" cy="237744"/>
+          </a:xfrm>
+          <a:prstGeom prst="roundRect">
+            <a:avLst>
+              <a:gd name="adj" fmla="val 28000"/>
+            </a:avLst>
+          </a:prstGeom>
+          <a:solidFill>
+            <a:srgbClr val="C9A227"/>
+          </a:solidFill>
+          <a:ln>
+            <a:noFill/>
+          </a:ln>
+          <a:effectLst/>
+        </p:spPr>
+        <p:style>
+          <a:lnRef idx="1">
+            <a:schemeClr val="accent1"/>
+          </a:lnRef>
+          <a:fillRef idx="3">
+            <a:schemeClr val="accent1"/>
+          </a:fillRef>
+          <a:effectRef idx="2">
+            <a:schemeClr val="accent1"/>
+          </a:effectRef>
+          <a:fontRef idx="minor">
+            <a:schemeClr val="lt1"/>
+          </a:fontRef>
+        </p:style>
+        <p:txBody>
+          <a:bodyPr rtlCol="0" anchor="ctr"/>
+          <a:lstStyle/>
+          <a:p>
+            <a:pPr algn="ctr"/>
+          </a:p>
+        </p:txBody>
+      </p:sp>
+      <p:sp>
+        <p:nvSpPr>
+          <p:cNvPr id="38" name="TextBox 37"/>
+          <p:cNvSpPr txBox="1"/>
+          <p:nvPr/>
+        </p:nvSpPr>
+        <p:spPr>
+          <a:xfrm>
+            <a:off x="621792" y="4396798"/>
+            <a:ext cx="237744" cy="237744"/>
+          </a:xfrm>
+          <a:prstGeom prst="rect">
+            <a:avLst/>
+          </a:prstGeom>
+          <a:noFill/>
+        </p:spPr>
+        <p:txBody>
+          <a:bodyPr wrap="square" anchor="ctr" lIns="0" rIns="0" tIns="0" bIns="0">
+            <a:spAutoFit/>
+          </a:bodyPr>
+          <a:lstStyle/>
+          <a:p>
+            <a:pPr algn="ctr">
+              <a:lnSpc>
+                <a:spcPct val="114000"/>
+              </a:lnSpc>
+            </a:pPr>
+            <a:r>
+              <a:rPr sz="1000" b="1">
+                <a:solidFill>
+                  <a:srgbClr val="FFFFFF"/>
+                </a:solidFill>
+              </a:rPr>
+              <a:t>A</a:t>
+            </a:r>
+          </a:p>
+        </p:txBody>
+      </p:sp>
+      <p:sp>
+        <p:nvSpPr>
+          <p:cNvPr id="39" name="TextBox 38"/>
+          <p:cNvSpPr txBox="1"/>
+          <p:nvPr/>
+        </p:nvSpPr>
+        <p:spPr>
+          <a:xfrm>
+            <a:off x="932688" y="4378510"/>
+            <a:ext cx="8778240" cy="274320"/>
+          </a:xfrm>
+          <a:prstGeom prst="rect">
+            <a:avLst/>
+          </a:prstGeom>
+          <a:noFill/>
+        </p:spPr>
+        <p:txBody>
+          <a:bodyPr wrap="square" anchor="ctr" lIns="0" rIns="0" tIns="0" bIns="0">
+            <a:spAutoFit/>
+          </a:bodyPr>
+          <a:lstStyle/>
+          <a:p>
+            <a:pPr algn="l">
+              <a:lnSpc>
+                <a:spcPct val="114000"/>
+              </a:lnSpc>
+            </a:pPr>
+            <a:r>
+              <a:rPr sz="1050" b="1">
+                <a:solidFill>
+                  <a:srgbClr val="1B2B28"/>
+                </a:solidFill>
+              </a:rPr>
+              <a:t>超优</a:t>
+            </a:r>
+            <a:r>
+              <a:rPr sz="850" b="0">
+                <a:solidFill>
+                  <a:srgbClr val="5C6E6A"/>
+                </a:solidFill>
+              </a:rPr>
+              <a:t>   验收口径：</a:t>
+            </a:r>
+            <a:r>
+              <a:rPr sz="850" b="0">
+                <a:solidFill>
+                  <a:srgbClr val="5C6E6A"/>
+                </a:solidFill>
+              </a:rPr>
+              <a:t>优秀+增量处理/自定义验证规则/100万行&lt;5分钟</a:t>
+            </a:r>
+          </a:p>
+        </p:txBody>
+      </p:sp>
+      <p:sp>
+        <p:nvSpPr>
+          <p:cNvPr id="40" name="Rounded Rectangle 39"/>
+          <p:cNvSpPr/>
+          <p:nvPr/>
+        </p:nvSpPr>
+        <p:spPr>
+          <a:xfrm>
+            <a:off x="11131803" y="4405942"/>
+            <a:ext cx="453644" cy="237744"/>
+          </a:xfrm>
+          <a:prstGeom prst="roundRect">
+            <a:avLst>
+              <a:gd name="adj" fmla="val 50000"/>
+            </a:avLst>
+          </a:prstGeom>
+          <a:solidFill>
+            <a:srgbClr val="0B5E54"/>
+          </a:solidFill>
+          <a:ln>
+            <a:noFill/>
+          </a:ln>
+          <a:effectLst/>
+        </p:spPr>
+        <p:style>
+          <a:lnRef idx="1">
+            <a:schemeClr val="accent1"/>
+          </a:lnRef>
+          <a:fillRef idx="3">
+            <a:schemeClr val="accent1"/>
+          </a:fillRef>
+          <a:effectRef idx="2">
+            <a:schemeClr val="accent1"/>
+          </a:effectRef>
+          <a:fontRef idx="minor">
+            <a:schemeClr val="lt1"/>
+          </a:fontRef>
+        </p:style>
+        <p:txBody>
+          <a:bodyPr rtlCol="0" anchor="ctr"/>
+          <a:lstStyle/>
+          <a:p>
+            <a:pPr algn="ctr"/>
+          </a:p>
+        </p:txBody>
+      </p:sp>
+      <p:sp>
+        <p:nvSpPr>
+          <p:cNvPr id="41" name="TextBox 40"/>
+          <p:cNvSpPr txBox="1"/>
+          <p:nvPr/>
+        </p:nvSpPr>
+        <p:spPr>
+          <a:xfrm>
+            <a:off x="11131803" y="4405942"/>
+            <a:ext cx="453644" cy="237744"/>
+          </a:xfrm>
+          <a:prstGeom prst="rect">
+            <a:avLst/>
+          </a:prstGeom>
+          <a:noFill/>
+        </p:spPr>
+        <p:txBody>
+          <a:bodyPr wrap="square" anchor="ctr" lIns="0" rIns="0" tIns="0" bIns="0">
+            <a:spAutoFit/>
+          </a:bodyPr>
+          <a:lstStyle/>
+          <a:p>
+            <a:pPr algn="ctr">
+              <a:lnSpc>
+                <a:spcPct val="114000"/>
+              </a:lnSpc>
+            </a:pPr>
+            <a:r>
+              <a:rPr sz="850" b="1">
+                <a:solidFill>
+                  <a:srgbClr val="FFFFFF"/>
+                </a:solidFill>
+              </a:rPr>
+              <a:t>达标</a:t>
+            </a:r>
+          </a:p>
+        </p:txBody>
+      </p:sp>
+      <p:sp>
+        <p:nvSpPr>
+          <p:cNvPr id="42" name="TextBox 41"/>
+          <p:cNvSpPr txBox="1"/>
+          <p:nvPr/>
+        </p:nvSpPr>
+        <p:spPr>
+          <a:xfrm>
+            <a:off x="932688" y="4661974"/>
+            <a:ext cx="10671047" cy="696409"/>
+          </a:xfrm>
+          <a:prstGeom prst="rect">
+            <a:avLst/>
+          </a:prstGeom>
+          <a:noFill/>
+        </p:spPr>
+        <p:txBody>
+          <a:bodyPr wrap="square" anchor="t" lIns="0" rIns="0" tIns="0" bIns="0">
+            <a:spAutoFit/>
+          </a:bodyPr>
+          <a:lstStyle/>
+          <a:p>
+            <a:pPr algn="l">
+              <a:lnSpc>
+                <a:spcPct val="114000"/>
+              </a:lnSpc>
+            </a:pPr>
+            <a:r>
+              <a:rPr sz="950" b="0">
+                <a:solidFill>
+                  <a:srgbClr val="1B2B28"/>
+                </a:solidFill>
+              </a:rPr>
+              <a:t>增量重放 clean.csv 与全量逐字节一致（新增 0 行）｜自定义验证规则 3 条逐条计数、本次剔 0 行（分步见第 8 节）｜压测 1004740 行走同一条七步管道，预算 300s 内完成【达标】（verdict 取 runtime/bench.json 记录，秒数为波动指标不进本表）</a:t>
+            </a:r>
+          </a:p>
+        </p:txBody>
+      </p:sp>
+      <p:sp>
+        <p:nvSpPr>
+          <p:cNvPr id="43" name="Rounded Rectangle 42"/>
+          <p:cNvSpPr/>
+          <p:nvPr/>
+        </p:nvSpPr>
+        <p:spPr>
+          <a:xfrm>
+            <a:off x="475488" y="5477256"/>
+            <a:ext cx="11237976" cy="941831"/>
+          </a:xfrm>
+          <a:prstGeom prst="roundRect">
+            <a:avLst>
+              <a:gd name="adj" fmla="val 5000"/>
+            </a:avLst>
+          </a:prstGeom>
+          <a:solidFill>
+            <a:srgbClr val="E4F1EE"/>
+          </a:solidFill>
+          <a:ln>
+            <a:noFill/>
+          </a:ln>
+          <a:effectLst/>
+        </p:spPr>
+        <p:style>
+          <a:lnRef idx="1">
+            <a:schemeClr val="accent1"/>
+          </a:lnRef>
+          <a:fillRef idx="3">
+            <a:schemeClr val="accent1"/>
+          </a:fillRef>
+          <a:effectRef idx="2">
+            <a:schemeClr val="accent1"/>
+          </a:effectRef>
+          <a:fontRef idx="minor">
+            <a:schemeClr val="lt1"/>
+          </a:fontRef>
+        </p:style>
+        <p:txBody>
+          <a:bodyPr rtlCol="0" anchor="ctr"/>
+          <a:lstStyle/>
+          <a:p>
+            <a:pPr algn="ctr"/>
+          </a:p>
+        </p:txBody>
+      </p:sp>
+      <p:sp>
+        <p:nvSpPr>
+          <p:cNvPr id="44" name="Rounded Rectangle 43"/>
+          <p:cNvSpPr/>
+          <p:nvPr/>
+        </p:nvSpPr>
+        <p:spPr>
+          <a:xfrm>
+            <a:off x="475488" y="5477256"/>
+            <a:ext cx="54864" cy="941831"/>
+          </a:xfrm>
+          <a:prstGeom prst="roundRect">
+            <a:avLst>
+              <a:gd name="adj" fmla="val 50000"/>
+            </a:avLst>
+          </a:prstGeom>
+          <a:solidFill>
+            <a:srgbClr val="C9A227"/>
+          </a:solidFill>
+          <a:ln>
+            <a:noFill/>
+          </a:ln>
+          <a:effectLst/>
+        </p:spPr>
+        <p:style>
+          <a:lnRef idx="1">
+            <a:schemeClr val="accent1"/>
+          </a:lnRef>
+          <a:fillRef idx="3">
+            <a:schemeClr val="accent1"/>
+          </a:fillRef>
+          <a:effectRef idx="2">
+            <a:schemeClr val="accent1"/>
+          </a:effectRef>
+          <a:fontRef idx="minor">
+            <a:schemeClr val="lt1"/>
+          </a:fontRef>
+        </p:style>
+        <p:txBody>
+          <a:bodyPr rtlCol="0" anchor="ctr"/>
+          <a:lstStyle/>
+          <a:p>
+            <a:pPr algn="ctr"/>
+          </a:p>
+        </p:txBody>
+      </p:sp>
+      <p:sp>
+        <p:nvSpPr>
+          <p:cNvPr id="45" name="TextBox 44"/>
+          <p:cNvSpPr txBox="1"/>
+          <p:nvPr/>
+        </p:nvSpPr>
+        <p:spPr>
+          <a:xfrm>
+            <a:off x="676656" y="5550408"/>
+            <a:ext cx="10908792" cy="795527"/>
+          </a:xfrm>
+          <a:prstGeom prst="rect">
+            <a:avLst/>
+          </a:prstGeom>
+          <a:noFill/>
+        </p:spPr>
+        <p:txBody>
+          <a:bodyPr wrap="square" anchor="t" lIns="0" rIns="0" tIns="0" bIns="0">
+            <a:spAutoFit/>
+          </a:bodyPr>
+          <a:lstStyle/>
+          <a:p>
+            <a:pPr algn="l">
+              <a:lnSpc>
+                <a:spcPct val="124000"/>
+              </a:lnSpc>
+            </a:pPr>
+            <a:r>
+              <a:rPr sz="850" b="0">
+                <a:solidFill>
+                  <a:srgbClr val="1B2B28"/>
+                </a:solidFill>
+              </a:rPr>
+              <a:t>出处：工程化项目/p21_pandas_clean/output/report.txt 第 132 节「分层达标」——本机 2026-10-28 05:07 实跑落盘，上表数字逐字摘录、未改写。</a:t>
+            </a:r>
+          </a:p>
+          <a:p>
+            <a:pPr algn="l">
+              <a:lnSpc>
+                <a:spcPct val="124000"/>
+              </a:lnSpc>
+            </a:pPr>
+            <a:r>
+              <a:rPr sz="850" b="0">
+                <a:solidFill>
+                  <a:srgbClr val="1B2B28"/>
+                </a:solidFill>
+              </a:rPr>
+              <a:t>复现：cd 工程化项目/p21_pandas_clean &amp;&amp; python run.py &amp;&amp; python -m pytest -q -o addopts=''</a:t>
+            </a:r>
+          </a:p>
+          <a:p>
+            <a:pPr algn="l">
+              <a:lnSpc>
+                <a:spcPct val="124000"/>
+              </a:lnSpc>
+            </a:pPr>
+            <a:r>
+              <a:rPr sz="850" b="0">
+                <a:solidFill>
+                  <a:srgbClr val="1B2B28"/>
+                </a:solidFill>
+              </a:rPr>
+              <a:t>口径：表中「判定」沿用报告原词——绿=达标/通过，黄=仅本节取证项通过（未取证子项在报告里逐条点名），红=未达标。</a:t>
+            </a:r>
+          </a:p>
+        </p:txBody>
+      </p:sp>
+    </p:spTree>
+  </p:cSld>
+  <p:clrMapOvr>
+    <a:masterClrMapping/>
+  </p:clrMapOvr>
+</p:sld>
+</file>
+
+<file path=ppt/slides/slide66.xml><?xml version="1.0" encoding="utf-8"?>
+<p:sld xmlns:a="http://schemas.openxmlformats.org/drawingml/2006/main" xmlns:p="http://schemas.openxmlformats.org/presentationml/2006/main" xmlns:r="http://schemas.openxmlformats.org/officeDocument/2006/relationships">
+  <p:cSld>
+    <p:spTree>
+      <p:nvGrpSpPr>
+        <p:cNvPr id="1" name=""/>
+        <p:cNvGrpSpPr/>
+        <p:nvPr/>
+      </p:nvGrpSpPr>
+      <p:grpSpPr/>
+      <p:sp>
+        <p:nvSpPr>
+          <p:cNvPr id="2" name="Rounded Rectangle 1"/>
+          <p:cNvSpPr/>
+          <p:nvPr/>
+        </p:nvSpPr>
+        <p:spPr>
+          <a:xfrm>
+            <a:off x="0" y="0"/>
+            <a:ext cx="12191695" cy="64008"/>
+          </a:xfrm>
+          <a:prstGeom prst="roundRect">
+            <a:avLst>
+              <a:gd name="adj" fmla="val 50000"/>
+            </a:avLst>
+          </a:prstGeom>
+          <a:solidFill>
+            <a:srgbClr val="0B5E54"/>
+          </a:solidFill>
+          <a:ln>
+            <a:noFill/>
+          </a:ln>
+          <a:effectLst/>
+        </p:spPr>
+        <p:style>
+          <a:lnRef idx="1">
+            <a:schemeClr val="accent1"/>
+          </a:lnRef>
+          <a:fillRef idx="3">
+            <a:schemeClr val="accent1"/>
+          </a:fillRef>
+          <a:effectRef idx="2">
+            <a:schemeClr val="accent1"/>
+          </a:effectRef>
+          <a:fontRef idx="minor">
+            <a:schemeClr val="lt1"/>
+          </a:fontRef>
+        </p:style>
+        <p:txBody>
+          <a:bodyPr rtlCol="0" anchor="ctr"/>
+          <a:lstStyle/>
+          <a:p>
+            <a:pPr algn="ctr"/>
+          </a:p>
+        </p:txBody>
+      </p:sp>
+      <p:sp>
+        <p:nvSpPr>
+          <p:cNvPr id="3" name="TextBox 2"/>
+          <p:cNvSpPr txBox="1"/>
+          <p:nvPr/>
+        </p:nvSpPr>
+        <p:spPr>
+          <a:xfrm>
+            <a:off x="475488" y="146304"/>
+            <a:ext cx="8229600" cy="292608"/>
+          </a:xfrm>
+          <a:prstGeom prst="rect">
+            <a:avLst/>
+          </a:prstGeom>
+          <a:noFill/>
+        </p:spPr>
+        <p:txBody>
+          <a:bodyPr wrap="square" anchor="t" lIns="0" rIns="0" tIns="0" bIns="0">
+            <a:spAutoFit/>
+          </a:bodyPr>
+          <a:lstStyle/>
+          <a:p>
+            <a:pPr algn="l">
+              <a:lnSpc>
+                <a:spcPct val="114000"/>
+              </a:lnSpc>
+            </a:pPr>
+            <a:r>
+              <a:rPr sz="1100" b="1">
+                <a:solidFill>
+                  <a:srgbClr val="0B5E54"/>
+                </a:solidFill>
+              </a:rPr>
+              <a:t>工单实战 · 运行留证</a:t>
+            </a:r>
+          </a:p>
+        </p:txBody>
+      </p:sp>
+      <p:sp>
+        <p:nvSpPr>
+          <p:cNvPr id="4" name="Rounded Rectangle 3"/>
+          <p:cNvSpPr/>
+          <p:nvPr/>
+        </p:nvSpPr>
+        <p:spPr>
+          <a:xfrm>
+            <a:off x="475488" y="475488"/>
+            <a:ext cx="2027872" cy="310896"/>
+          </a:xfrm>
+          <a:prstGeom prst="roundRect">
+            <a:avLst>
+              <a:gd name="adj" fmla="val 50000"/>
+            </a:avLst>
+          </a:prstGeom>
+          <a:solidFill>
+            <a:srgbClr val="C9A227"/>
+          </a:solidFill>
+          <a:ln>
+            <a:noFill/>
+          </a:ln>
+          <a:effectLst/>
+        </p:spPr>
+        <p:style>
+          <a:lnRef idx="1">
+            <a:schemeClr val="accent1"/>
+          </a:lnRef>
+          <a:fillRef idx="3">
+            <a:schemeClr val="accent1"/>
+          </a:fillRef>
+          <a:effectRef idx="2">
+            <a:schemeClr val="accent1"/>
+          </a:effectRef>
+          <a:fontRef idx="minor">
+            <a:schemeClr val="lt1"/>
+          </a:fontRef>
+        </p:style>
+        <p:txBody>
+          <a:bodyPr rtlCol="0" anchor="ctr"/>
+          <a:lstStyle/>
+          <a:p>
+            <a:pPr algn="ctr"/>
+          </a:p>
+        </p:txBody>
+      </p:sp>
+      <p:sp>
+        <p:nvSpPr>
+          <p:cNvPr id="5" name="TextBox 4"/>
+          <p:cNvSpPr txBox="1"/>
+          <p:nvPr/>
+        </p:nvSpPr>
+        <p:spPr>
+          <a:xfrm>
+            <a:off x="475488" y="475488"/>
+            <a:ext cx="2027872" cy="310896"/>
+          </a:xfrm>
+          <a:prstGeom prst="rect">
+            <a:avLst/>
+          </a:prstGeom>
+          <a:noFill/>
+        </p:spPr>
+        <p:txBody>
+          <a:bodyPr wrap="square" anchor="ctr" lIns="0" rIns="0" tIns="0" bIns="0">
+            <a:spAutoFit/>
+          </a:bodyPr>
+          <a:lstStyle/>
+          <a:p>
+            <a:pPr algn="ctr">
+              <a:lnSpc>
+                <a:spcPct val="114000"/>
+              </a:lnSpc>
+            </a:pPr>
+            <a:r>
+              <a:rPr sz="1050" b="1">
+                <a:solidFill>
+                  <a:srgbClr val="FFFFFF"/>
+                </a:solidFill>
+              </a:rPr>
+              <a:t>SCREENSHOT · 终端逐字截图</a:t>
+            </a:r>
+          </a:p>
+        </p:txBody>
+      </p:sp>
+      <p:sp>
+        <p:nvSpPr>
+          <p:cNvPr id="6" name="TextBox 5"/>
+          <p:cNvSpPr txBox="1"/>
+          <p:nvPr/>
+        </p:nvSpPr>
+        <p:spPr>
+          <a:xfrm>
+            <a:off x="475488" y="859536"/>
+            <a:ext cx="11237976" cy="502920"/>
+          </a:xfrm>
+          <a:prstGeom prst="rect">
+            <a:avLst/>
+          </a:prstGeom>
+          <a:noFill/>
+        </p:spPr>
+        <p:txBody>
+          <a:bodyPr wrap="square" anchor="t" lIns="0" rIns="0" tIns="0" bIns="0">
+            <a:spAutoFit/>
+          </a:bodyPr>
+          <a:lstStyle/>
+          <a:p>
+            <a:pPr algn="l">
+              <a:lnSpc>
+                <a:spcPct val="114000"/>
+              </a:lnSpc>
+            </a:pPr>
+            <a:r>
+              <a:rPr sz="2200" b="1">
+                <a:solidFill>
+                  <a:srgbClr val="1B2B28"/>
+                </a:solidFill>
+              </a:rPr>
+              <a:t>P2.1 分层达标 · 四档逐字输出截图</a:t>
+            </a:r>
+          </a:p>
+        </p:txBody>
+      </p:sp>
+      <p:sp>
+        <p:nvSpPr>
+          <p:cNvPr id="7" name="Rounded Rectangle 6"/>
+          <p:cNvSpPr/>
+          <p:nvPr/>
+        </p:nvSpPr>
+        <p:spPr>
+          <a:xfrm>
+            <a:off x="475488" y="1389888"/>
+            <a:ext cx="1234440" cy="27432"/>
+          </a:xfrm>
+          <a:prstGeom prst="roundRect">
+            <a:avLst>
+              <a:gd name="adj" fmla="val 50000"/>
+            </a:avLst>
+          </a:prstGeom>
+          <a:solidFill>
+            <a:srgbClr val="C9A227"/>
+          </a:solidFill>
+          <a:ln>
+            <a:noFill/>
+          </a:ln>
+          <a:effectLst/>
+        </p:spPr>
+        <p:style>
+          <a:lnRef idx="1">
+            <a:schemeClr val="accent1"/>
+          </a:lnRef>
+          <a:fillRef idx="3">
+            <a:schemeClr val="accent1"/>
+          </a:fillRef>
+          <a:effectRef idx="2">
+            <a:schemeClr val="accent1"/>
+          </a:effectRef>
+          <a:fontRef idx="minor">
+            <a:schemeClr val="lt1"/>
+          </a:fontRef>
+        </p:style>
+        <p:txBody>
+          <a:bodyPr rtlCol="0" anchor="ctr"/>
+          <a:lstStyle/>
+          <a:p>
+            <a:pPr algn="ctr"/>
+          </a:p>
+        </p:txBody>
+      </p:sp>
+      <p:sp>
+        <p:nvSpPr>
+          <p:cNvPr id="8" name="Rounded Rectangle 7"/>
+          <p:cNvSpPr/>
+          <p:nvPr/>
+        </p:nvSpPr>
+        <p:spPr>
+          <a:xfrm>
+            <a:off x="475488" y="6419088"/>
+            <a:ext cx="11237976" cy="10972"/>
+          </a:xfrm>
+          <a:prstGeom prst="roundRect">
+            <a:avLst>
+              <a:gd name="adj" fmla="val 50000"/>
+            </a:avLst>
+          </a:prstGeom>
+          <a:solidFill>
+            <a:srgbClr val="E4F1EE"/>
+          </a:solidFill>
+          <a:ln>
+            <a:noFill/>
+          </a:ln>
+          <a:effectLst/>
+        </p:spPr>
+        <p:style>
+          <a:lnRef idx="1">
+            <a:schemeClr val="accent1"/>
+          </a:lnRef>
+          <a:fillRef idx="3">
+            <a:schemeClr val="accent1"/>
+          </a:fillRef>
+          <a:effectRef idx="2">
+            <a:schemeClr val="accent1"/>
+          </a:effectRef>
+          <a:fontRef idx="minor">
+            <a:schemeClr val="lt1"/>
+          </a:fontRef>
+        </p:style>
+        <p:txBody>
+          <a:bodyPr rtlCol="0" anchor="ctr"/>
+          <a:lstStyle/>
+          <a:p>
+            <a:pPr algn="ctr"/>
+          </a:p>
+        </p:txBody>
+      </p:sp>
+      <p:sp>
+        <p:nvSpPr>
+          <p:cNvPr id="9" name="TextBox 8"/>
+          <p:cNvSpPr txBox="1"/>
+          <p:nvPr/>
+        </p:nvSpPr>
+        <p:spPr>
+          <a:xfrm>
+            <a:off x="475488" y="6455664"/>
+            <a:ext cx="7315200" cy="292608"/>
+          </a:xfrm>
+          <a:prstGeom prst="rect">
+            <a:avLst/>
+          </a:prstGeom>
+          <a:noFill/>
+        </p:spPr>
+        <p:txBody>
+          <a:bodyPr wrap="square" anchor="t" lIns="0" rIns="0" tIns="0" bIns="0">
+            <a:spAutoFit/>
+          </a:bodyPr>
+          <a:lstStyle/>
+          <a:p>
+            <a:pPr algn="l">
+              <a:lnSpc>
+                <a:spcPct val="114000"/>
+              </a:lnSpc>
+            </a:pPr>
+            <a:r>
+              <a:rPr sz="900" b="0">
+                <a:solidFill>
+                  <a:srgbClr val="5C6E6A"/>
+                </a:solidFill>
+              </a:rPr>
+              <a:t>两江智造集团 · Python程序设计（项目实战）</a:t>
+            </a:r>
+          </a:p>
+        </p:txBody>
+      </p:sp>
+      <p:sp>
+        <p:nvSpPr>
+          <p:cNvPr id="10" name="TextBox 9"/>
+          <p:cNvSpPr txBox="1"/>
+          <p:nvPr/>
+        </p:nvSpPr>
+        <p:spPr>
+          <a:xfrm>
+            <a:off x="10597896" y="6537960"/>
+            <a:ext cx="996696" cy="301752"/>
+          </a:xfrm>
+          <a:prstGeom prst="rect">
+            <a:avLst/>
+          </a:prstGeom>
+          <a:noFill/>
+        </p:spPr>
+        <p:txBody>
+          <a:bodyPr wrap="square" anchor="t" lIns="0" rIns="0" tIns="0" bIns="0">
+            <a:spAutoFit/>
+          </a:bodyPr>
+          <a:lstStyle/>
+          <a:p>
+            <a:pPr algn="r">
+              <a:lnSpc>
+                <a:spcPct val="114000"/>
+              </a:lnSpc>
+            </a:pPr>
+            <a:r>
+              <a:rPr sz="1000" b="0">
+                <a:solidFill>
+                  <a:srgbClr val="8A97B5"/>
+                </a:solidFill>
+              </a:rPr>
+              <a:t>50 / 67</a:t>
+            </a:r>
+          </a:p>
+        </p:txBody>
+      </p:sp>
+      <p:sp>
+        <p:nvSpPr>
+          <p:cNvPr id="11" name="TextBox 10"/>
+          <p:cNvSpPr txBox="1"/>
+          <p:nvPr/>
+        </p:nvSpPr>
+        <p:spPr>
+          <a:xfrm>
+            <a:off x="475488" y="1517904"/>
+            <a:ext cx="11237976" cy="237744"/>
+          </a:xfrm>
+          <a:prstGeom prst="rect">
+            <a:avLst/>
+          </a:prstGeom>
+          <a:noFill/>
+        </p:spPr>
+        <p:txBody>
+          <a:bodyPr wrap="square" anchor="t" lIns="0" rIns="0" tIns="0" bIns="0">
+            <a:spAutoFit/>
+          </a:bodyPr>
+          <a:lstStyle/>
+          <a:p>
+            <a:pPr algn="l">
+              <a:lnSpc>
+                <a:spcPct val="114000"/>
+              </a:lnSpc>
+            </a:pPr>
+            <a:r>
+              <a:rPr sz="1000" b="0">
+                <a:solidFill>
+                  <a:srgbClr val="5C6E6A"/>
+                </a:solidFill>
+              </a:rPr>
+              <a:t>终端窗口截图：由 report.txt 本节逐字渲染，未手工改写</a:t>
+            </a:r>
+          </a:p>
+        </p:txBody>
+      </p:sp>
+      <p:pic>
+        <p:nvPicPr>
+          <p:cNvPr id="12" name="Picture 11" descr="p21_pandas_clean_classroom.png"/>
+          <p:cNvPicPr>
+            <a:picLocks noChangeAspect="1"/>
+          </p:cNvPicPr>
+          <p:nvPr/>
+        </p:nvPicPr>
+        <p:blipFill>
+          <a:blip r:embed="rId2"/>
+          <a:stretch>
+            <a:fillRect/>
+          </a:stretch>
+        </p:blipFill>
+        <p:spPr>
+          <a:xfrm>
+            <a:off x="475488" y="1935816"/>
+            <a:ext cx="11237976" cy="3562438"/>
+          </a:xfrm>
+          <a:prstGeom prst="rect">
+            <a:avLst/>
+          </a:prstGeom>
+        </p:spPr>
+      </p:pic>
+      <p:sp>
+        <p:nvSpPr>
+          <p:cNvPr id="13" name="TextBox 12"/>
+          <p:cNvSpPr txBox="1"/>
+          <p:nvPr/>
+        </p:nvSpPr>
+        <p:spPr>
+          <a:xfrm>
+            <a:off x="475488" y="5534831"/>
+            <a:ext cx="11237976" cy="256032"/>
+          </a:xfrm>
+          <a:prstGeom prst="rect">
+            <a:avLst/>
+          </a:prstGeom>
+          <a:noFill/>
+        </p:spPr>
+        <p:txBody>
+          <a:bodyPr wrap="square" anchor="t" lIns="0" rIns="0" tIns="0" bIns="0">
+            <a:spAutoFit/>
+          </a:bodyPr>
+          <a:lstStyle/>
+          <a:p>
+            <a:pPr algn="l">
+              <a:lnSpc>
+                <a:spcPct val="114000"/>
+              </a:lnSpc>
+            </a:pPr>
+            <a:r>
+              <a:rPr sz="850" b="0">
+                <a:solidFill>
+                  <a:srgbClr val="5C6E6A"/>
+                </a:solidFill>
+              </a:rPr>
+              <a:t>▲ p21_pandas_clean：分层达标 第 132 行起的四档逐字原文（绿=达标/通过，黄=仅本节取证项，橙=未实测项）</a:t>
+            </a:r>
+          </a:p>
+        </p:txBody>
+      </p:sp>
+    </p:spTree>
+  </p:cSld>
+  <p:clrMapOvr>
+    <a:masterClrMapping/>
+  </p:clrMapOvr>
+</p:sld>
+</file>
+
+<file path=ppt/slides/slide67.xml><?xml version="1.0" encoding="utf-8"?>
+<p:sld xmlns:a="http://schemas.openxmlformats.org/drawingml/2006/main" xmlns:p="http://schemas.openxmlformats.org/presentationml/2006/main" xmlns:r="http://schemas.openxmlformats.org/officeDocument/2006/relationships">
+  <p:cSld>
+    <p:spTree>
+      <p:nvGrpSpPr>
+        <p:cNvPr id="1" name=""/>
+        <p:cNvGrpSpPr/>
+        <p:nvPr/>
+      </p:nvGrpSpPr>
+      <p:grpSpPr/>
+      <p:sp>
+        <p:nvSpPr>
+          <p:cNvPr id="2" name="Rounded Rectangle 1"/>
+          <p:cNvSpPr/>
+          <p:nvPr/>
+        </p:nvSpPr>
+        <p:spPr>
+          <a:xfrm>
+            <a:off x="0" y="0"/>
+            <a:ext cx="12191695" cy="64008"/>
+          </a:xfrm>
+          <a:prstGeom prst="roundRect">
+            <a:avLst>
+              <a:gd name="adj" fmla="val 50000"/>
+            </a:avLst>
+          </a:prstGeom>
+          <a:solidFill>
+            <a:srgbClr val="0B5E54"/>
+          </a:solidFill>
+          <a:ln>
+            <a:noFill/>
+          </a:ln>
+          <a:effectLst/>
+        </p:spPr>
+        <p:style>
+          <a:lnRef idx="1">
+            <a:schemeClr val="accent1"/>
+          </a:lnRef>
+          <a:fillRef idx="3">
+            <a:schemeClr val="accent1"/>
+          </a:fillRef>
+          <a:effectRef idx="2">
+            <a:schemeClr val="accent1"/>
+          </a:effectRef>
+          <a:fontRef idx="minor">
+            <a:schemeClr val="lt1"/>
+          </a:fontRef>
+        </p:style>
+        <p:txBody>
+          <a:bodyPr rtlCol="0" anchor="ctr"/>
+          <a:lstStyle/>
+          <a:p>
+            <a:pPr algn="ctr"/>
+          </a:p>
+        </p:txBody>
+      </p:sp>
+      <p:sp>
+        <p:nvSpPr>
+          <p:cNvPr id="3" name="TextBox 2"/>
+          <p:cNvSpPr txBox="1"/>
+          <p:nvPr/>
+        </p:nvSpPr>
+        <p:spPr>
+          <a:xfrm>
+            <a:off x="475488" y="146304"/>
+            <a:ext cx="8229600" cy="292608"/>
+          </a:xfrm>
+          <a:prstGeom prst="rect">
+            <a:avLst/>
+          </a:prstGeom>
+          <a:noFill/>
+        </p:spPr>
+        <p:txBody>
+          <a:bodyPr wrap="square" anchor="t" lIns="0" rIns="0" tIns="0" bIns="0">
+            <a:spAutoFit/>
+          </a:bodyPr>
+          <a:lstStyle/>
+          <a:p>
+            <a:pPr algn="l">
+              <a:lnSpc>
+                <a:spcPct val="114000"/>
+              </a:lnSpc>
+            </a:pPr>
+            <a:r>
+              <a:rPr sz="1100" b="1">
+                <a:solidFill>
+                  <a:srgbClr val="0B5E54"/>
+                </a:solidFill>
+              </a:rPr>
+              <a:t>工单实战 · 运行留证</a:t>
+            </a:r>
+          </a:p>
+        </p:txBody>
+      </p:sp>
+      <p:sp>
+        <p:nvSpPr>
+          <p:cNvPr id="4" name="Rounded Rectangle 3"/>
+          <p:cNvSpPr/>
+          <p:nvPr/>
+        </p:nvSpPr>
+        <p:spPr>
+          <a:xfrm>
+            <a:off x="475488" y="475488"/>
+            <a:ext cx="2027872" cy="310896"/>
+          </a:xfrm>
+          <a:prstGeom prst="roundRect">
+            <a:avLst>
+              <a:gd name="adj" fmla="val 50000"/>
+            </a:avLst>
+          </a:prstGeom>
+          <a:solidFill>
+            <a:srgbClr val="C9A227"/>
+          </a:solidFill>
+          <a:ln>
+            <a:noFill/>
+          </a:ln>
+          <a:effectLst/>
+        </p:spPr>
+        <p:style>
+          <a:lnRef idx="1">
+            <a:schemeClr val="accent1"/>
+          </a:lnRef>
+          <a:fillRef idx="3">
+            <a:schemeClr val="accent1"/>
+          </a:fillRef>
+          <a:effectRef idx="2">
+            <a:schemeClr val="accent1"/>
+          </a:effectRef>
+          <a:fontRef idx="minor">
+            <a:schemeClr val="lt1"/>
+          </a:fontRef>
+        </p:style>
+        <p:txBody>
+          <a:bodyPr rtlCol="0" anchor="ctr"/>
+          <a:lstStyle/>
+          <a:p>
+            <a:pPr algn="ctr"/>
+          </a:p>
+        </p:txBody>
+      </p:sp>
+      <p:sp>
+        <p:nvSpPr>
+          <p:cNvPr id="5" name="TextBox 4"/>
+          <p:cNvSpPr txBox="1"/>
+          <p:nvPr/>
+        </p:nvSpPr>
+        <p:spPr>
+          <a:xfrm>
+            <a:off x="475488" y="475488"/>
+            <a:ext cx="2027872" cy="310896"/>
+          </a:xfrm>
+          <a:prstGeom prst="rect">
+            <a:avLst/>
+          </a:prstGeom>
+          <a:noFill/>
+        </p:spPr>
+        <p:txBody>
+          <a:bodyPr wrap="square" anchor="ctr" lIns="0" rIns="0" tIns="0" bIns="0">
+            <a:spAutoFit/>
+          </a:bodyPr>
+          <a:lstStyle/>
+          <a:p>
+            <a:pPr algn="ctr">
+              <a:lnSpc>
+                <a:spcPct val="114000"/>
+              </a:lnSpc>
+            </a:pPr>
+            <a:r>
+              <a:rPr sz="1050" b="1">
+                <a:solidFill>
+                  <a:srgbClr val="FFFFFF"/>
+                </a:solidFill>
+              </a:rPr>
+              <a:t>SCREENSHOT · 终端逐字截图</a:t>
+            </a:r>
+          </a:p>
+        </p:txBody>
+      </p:sp>
+      <p:sp>
+        <p:nvSpPr>
+          <p:cNvPr id="6" name="TextBox 5"/>
+          <p:cNvSpPr txBox="1"/>
+          <p:nvPr/>
+        </p:nvSpPr>
+        <p:spPr>
+          <a:xfrm>
+            <a:off x="475488" y="859536"/>
+            <a:ext cx="11237976" cy="502920"/>
+          </a:xfrm>
+          <a:prstGeom prst="rect">
+            <a:avLst/>
+          </a:prstGeom>
+          <a:noFill/>
+        </p:spPr>
+        <p:txBody>
+          <a:bodyPr wrap="square" anchor="t" lIns="0" rIns="0" tIns="0" bIns="0">
+            <a:spAutoFit/>
+          </a:bodyPr>
+          <a:lstStyle/>
+          <a:p>
+            <a:pPr algn="l">
+              <a:lnSpc>
+                <a:spcPct val="114000"/>
+              </a:lnSpc>
+            </a:pPr>
+            <a:r>
+              <a:rPr sz="2200" b="1">
+                <a:solidFill>
+                  <a:srgbClr val="1B2B28"/>
+                </a:solidFill>
+              </a:rPr>
+              <a:t>P2.1 · 测试全绿证据＋pytest 全量实跑</a:t>
+            </a:r>
+          </a:p>
+        </p:txBody>
+      </p:sp>
+      <p:sp>
+        <p:nvSpPr>
+          <p:cNvPr id="7" name="Rounded Rectangle 6"/>
+          <p:cNvSpPr/>
+          <p:nvPr/>
+        </p:nvSpPr>
+        <p:spPr>
+          <a:xfrm>
+            <a:off x="475488" y="1389888"/>
+            <a:ext cx="1234440" cy="27432"/>
+          </a:xfrm>
+          <a:prstGeom prst="roundRect">
+            <a:avLst>
+              <a:gd name="adj" fmla="val 50000"/>
+            </a:avLst>
+          </a:prstGeom>
+          <a:solidFill>
+            <a:srgbClr val="C9A227"/>
+          </a:solidFill>
+          <a:ln>
+            <a:noFill/>
+          </a:ln>
+          <a:effectLst/>
+        </p:spPr>
+        <p:style>
+          <a:lnRef idx="1">
+            <a:schemeClr val="accent1"/>
+          </a:lnRef>
+          <a:fillRef idx="3">
+            <a:schemeClr val="accent1"/>
+          </a:fillRef>
+          <a:effectRef idx="2">
+            <a:schemeClr val="accent1"/>
+          </a:effectRef>
+          <a:fontRef idx="minor">
+            <a:schemeClr val="lt1"/>
+          </a:fontRef>
+        </p:style>
+        <p:txBody>
+          <a:bodyPr rtlCol="0" anchor="ctr"/>
+          <a:lstStyle/>
+          <a:p>
+            <a:pPr algn="ctr"/>
+          </a:p>
+        </p:txBody>
+      </p:sp>
+      <p:sp>
+        <p:nvSpPr>
+          <p:cNvPr id="8" name="Rounded Rectangle 7"/>
+          <p:cNvSpPr/>
+          <p:nvPr/>
+        </p:nvSpPr>
+        <p:spPr>
+          <a:xfrm>
+            <a:off x="475488" y="6419088"/>
+            <a:ext cx="11237976" cy="10972"/>
+          </a:xfrm>
+          <a:prstGeom prst="roundRect">
+            <a:avLst>
+              <a:gd name="adj" fmla="val 50000"/>
+            </a:avLst>
+          </a:prstGeom>
+          <a:solidFill>
+            <a:srgbClr val="E4F1EE"/>
+          </a:solidFill>
+          <a:ln>
+            <a:noFill/>
+          </a:ln>
+          <a:effectLst/>
+        </p:spPr>
+        <p:style>
+          <a:lnRef idx="1">
+            <a:schemeClr val="accent1"/>
+          </a:lnRef>
+          <a:fillRef idx="3">
+            <a:schemeClr val="accent1"/>
+          </a:fillRef>
+          <a:effectRef idx="2">
+            <a:schemeClr val="accent1"/>
+          </a:effectRef>
+          <a:fontRef idx="minor">
+            <a:schemeClr val="lt1"/>
+          </a:fontRef>
+        </p:style>
+        <p:txBody>
+          <a:bodyPr rtlCol="0" anchor="ctr"/>
+          <a:lstStyle/>
+          <a:p>
+            <a:pPr algn="ctr"/>
+          </a:p>
+        </p:txBody>
+      </p:sp>
+      <p:sp>
+        <p:nvSpPr>
+          <p:cNvPr id="9" name="TextBox 8"/>
+          <p:cNvSpPr txBox="1"/>
+          <p:nvPr/>
+        </p:nvSpPr>
+        <p:spPr>
+          <a:xfrm>
+            <a:off x="475488" y="6455664"/>
+            <a:ext cx="7315200" cy="292608"/>
+          </a:xfrm>
+          <a:prstGeom prst="rect">
+            <a:avLst/>
+          </a:prstGeom>
+          <a:noFill/>
+        </p:spPr>
+        <p:txBody>
+          <a:bodyPr wrap="square" anchor="t" lIns="0" rIns="0" tIns="0" bIns="0">
+            <a:spAutoFit/>
+          </a:bodyPr>
+          <a:lstStyle/>
+          <a:p>
+            <a:pPr algn="l">
+              <a:lnSpc>
+                <a:spcPct val="114000"/>
+              </a:lnSpc>
+            </a:pPr>
+            <a:r>
+              <a:rPr sz="900" b="0">
+                <a:solidFill>
+                  <a:srgbClr val="5C6E6A"/>
+                </a:solidFill>
+              </a:rPr>
+              <a:t>两江智造集团 · Python程序设计（项目实战）</a:t>
+            </a:r>
+          </a:p>
+        </p:txBody>
+      </p:sp>
+      <p:sp>
+        <p:nvSpPr>
+          <p:cNvPr id="10" name="TextBox 9"/>
+          <p:cNvSpPr txBox="1"/>
+          <p:nvPr/>
+        </p:nvSpPr>
+        <p:spPr>
+          <a:xfrm>
+            <a:off x="10597896" y="6537960"/>
+            <a:ext cx="996696" cy="301752"/>
+          </a:xfrm>
+          <a:prstGeom prst="rect">
+            <a:avLst/>
+          </a:prstGeom>
+          <a:noFill/>
+        </p:spPr>
+        <p:txBody>
+          <a:bodyPr wrap="square" anchor="t" lIns="0" rIns="0" tIns="0" bIns="0">
+            <a:spAutoFit/>
+          </a:bodyPr>
+          <a:lstStyle/>
+          <a:p>
+            <a:pPr algn="r">
+              <a:lnSpc>
+                <a:spcPct val="114000"/>
+              </a:lnSpc>
+            </a:pPr>
+            <a:r>
+              <a:rPr sz="1000" b="0">
+                <a:solidFill>
+                  <a:srgbClr val="8A97B5"/>
+                </a:solidFill>
+              </a:rPr>
+              <a:t>51 / 67</a:t>
+            </a:r>
+          </a:p>
+        </p:txBody>
+      </p:sp>
+      <p:sp>
+        <p:nvSpPr>
+          <p:cNvPr id="11" name="TextBox 10"/>
+          <p:cNvSpPr txBox="1"/>
+          <p:nvPr/>
+        </p:nvSpPr>
+        <p:spPr>
+          <a:xfrm>
+            <a:off x="475488" y="1517904"/>
+            <a:ext cx="11237976" cy="237744"/>
+          </a:xfrm>
+          <a:prstGeom prst="rect">
+            <a:avLst/>
+          </a:prstGeom>
+          <a:noFill/>
+        </p:spPr>
+        <p:txBody>
+          <a:bodyPr wrap="square" anchor="t" lIns="0" rIns="0" tIns="0" bIns="0">
+            <a:spAutoFit/>
+          </a:bodyPr>
+          <a:lstStyle/>
+          <a:p>
+            <a:pPr algn="l">
+              <a:lnSpc>
+                <a:spcPct val="114000"/>
+              </a:lnSpc>
+            </a:pPr>
+            <a:r>
+              <a:rPr sz="1000" b="0">
+                <a:solidFill>
+                  <a:srgbClr val="5C6E6A"/>
+                </a:solidFill>
+              </a:rPr>
+              <a:t>pytest 全量实跑：本机真实运行输出，非示例、非节选</a:t>
+            </a:r>
+          </a:p>
+        </p:txBody>
+      </p:sp>
+      <p:pic>
+        <p:nvPicPr>
+          <p:cNvPr id="12" name="Picture 11" descr="p21_pandas_clean_pytest.png"/>
+          <p:cNvPicPr>
+            <a:picLocks noChangeAspect="1"/>
+          </p:cNvPicPr>
+          <p:nvPr/>
+        </p:nvPicPr>
+        <p:blipFill>
+          <a:blip r:embed="rId2"/>
+          <a:stretch>
+            <a:fillRect/>
+          </a:stretch>
+        </p:blipFill>
+        <p:spPr>
+          <a:xfrm>
+            <a:off x="475488" y="2490034"/>
+            <a:ext cx="11237976" cy="1539603"/>
+          </a:xfrm>
+          <a:prstGeom prst="rect">
+            <a:avLst/>
+          </a:prstGeom>
+        </p:spPr>
+      </p:pic>
+      <p:sp>
+        <p:nvSpPr>
+          <p:cNvPr id="13" name="TextBox 12"/>
+          <p:cNvSpPr txBox="1"/>
+          <p:nvPr/>
+        </p:nvSpPr>
+        <p:spPr>
+          <a:xfrm>
+            <a:off x="475488" y="4066213"/>
+            <a:ext cx="11237976" cy="256032"/>
+          </a:xfrm>
+          <a:prstGeom prst="rect">
+            <a:avLst/>
+          </a:prstGeom>
+          <a:noFill/>
+        </p:spPr>
+        <p:txBody>
+          <a:bodyPr wrap="square" anchor="t" lIns="0" rIns="0" tIns="0" bIns="0">
+            <a:spAutoFit/>
+          </a:bodyPr>
+          <a:lstStyle/>
+          <a:p>
+            <a:pPr algn="l">
+              <a:lnSpc>
+                <a:spcPct val="114000"/>
+              </a:lnSpc>
+            </a:pPr>
+            <a:r>
+              <a:rPr sz="850" b="0">
+                <a:solidFill>
+                  <a:srgbClr val="5C6E6A"/>
+                </a:solidFill>
+              </a:rPr>
+              <a:t>▲ pytest：34 passed in 52.60s（本机实跑，非示例）</a:t>
+            </a:r>
+          </a:p>
+        </p:txBody>
+      </p:sp>
+      <p:sp>
+        <p:nvSpPr>
+          <p:cNvPr id="14" name="Rounded Rectangle 13"/>
+          <p:cNvSpPr/>
+          <p:nvPr/>
+        </p:nvSpPr>
+        <p:spPr>
+          <a:xfrm>
+            <a:off x="475488" y="4431973"/>
+            <a:ext cx="11237976" cy="822960"/>
+          </a:xfrm>
+          <a:prstGeom prst="roundRect">
+            <a:avLst>
+              <a:gd name="adj" fmla="val 5000"/>
+            </a:avLst>
+          </a:prstGeom>
+          <a:solidFill>
+            <a:srgbClr val="E4F1EE"/>
+          </a:solidFill>
+          <a:ln>
+            <a:noFill/>
+          </a:ln>
+          <a:effectLst/>
+        </p:spPr>
+        <p:style>
+          <a:lnRef idx="1">
+            <a:schemeClr val="accent1"/>
+          </a:lnRef>
+          <a:fillRef idx="3">
+            <a:schemeClr val="accent1"/>
+          </a:fillRef>
+          <a:effectRef idx="2">
+            <a:schemeClr val="accent1"/>
+          </a:effectRef>
+          <a:fontRef idx="minor">
+            <a:schemeClr val="lt1"/>
+          </a:fontRef>
+        </p:style>
+        <p:txBody>
+          <a:bodyPr rtlCol="0" anchor="ctr"/>
+          <a:lstStyle/>
+          <a:p>
+            <a:pPr algn="ctr"/>
+          </a:p>
+        </p:txBody>
+      </p:sp>
+      <p:sp>
+        <p:nvSpPr>
+          <p:cNvPr id="15" name="Rounded Rectangle 14"/>
+          <p:cNvSpPr/>
+          <p:nvPr/>
+        </p:nvSpPr>
+        <p:spPr>
+          <a:xfrm>
+            <a:off x="475488" y="4431973"/>
+            <a:ext cx="54864" cy="822960"/>
+          </a:xfrm>
+          <a:prstGeom prst="roundRect">
+            <a:avLst>
+              <a:gd name="adj" fmla="val 50000"/>
+            </a:avLst>
+          </a:prstGeom>
+          <a:solidFill>
+            <a:srgbClr val="C9A227"/>
+          </a:solidFill>
+          <a:ln>
+            <a:noFill/>
+          </a:ln>
+          <a:effectLst/>
+        </p:spPr>
+        <p:style>
+          <a:lnRef idx="1">
+            <a:schemeClr val="accent1"/>
+          </a:lnRef>
+          <a:fillRef idx="3">
+            <a:schemeClr val="accent1"/>
+          </a:fillRef>
+          <a:effectRef idx="2">
+            <a:schemeClr val="accent1"/>
+          </a:effectRef>
+          <a:fontRef idx="minor">
+            <a:schemeClr val="lt1"/>
+          </a:fontRef>
+        </p:style>
+        <p:txBody>
+          <a:bodyPr rtlCol="0" anchor="ctr"/>
+          <a:lstStyle/>
+          <a:p>
+            <a:pPr algn="ctr"/>
+          </a:p>
+        </p:txBody>
+      </p:sp>
+      <p:sp>
+        <p:nvSpPr>
+          <p:cNvPr id="16" name="TextBox 15"/>
+          <p:cNvSpPr txBox="1"/>
+          <p:nvPr/>
+        </p:nvSpPr>
+        <p:spPr>
+          <a:xfrm>
+            <a:off x="676656" y="4514269"/>
+            <a:ext cx="10908792" cy="658368"/>
+          </a:xfrm>
+          <a:prstGeom prst="rect">
+            <a:avLst/>
+          </a:prstGeom>
+          <a:noFill/>
+        </p:spPr>
+        <p:txBody>
+          <a:bodyPr wrap="square" anchor="t" lIns="0" rIns="0" tIns="0" bIns="0">
+            <a:spAutoFit/>
+          </a:bodyPr>
+          <a:lstStyle/>
+          <a:p>
+            <a:pPr algn="l">
+              <a:lnSpc>
+                <a:spcPct val="126000"/>
+              </a:lnSpc>
+            </a:pPr>
+            <a:r>
+              <a:rPr sz="850" b="0">
+                <a:solidFill>
+                  <a:srgbClr val="1B2B28"/>
+                </a:solidFill>
+              </a:rPr>
+              <a:t>本项目四档只有一套阶梯口径（课堂 D/C/B/A 即工单及格/良好/优秀/超优），逐字实测见上一页截图；本页补的是测试全绿证据。</a:t>
+            </a:r>
+          </a:p>
+          <a:p>
+            <a:pPr algn="l">
+              <a:lnSpc>
+                <a:spcPct val="126000"/>
+              </a:lnSpc>
+            </a:pPr>
+            <a:r>
+              <a:rPr sz="850" b="0">
+                <a:solidFill>
+                  <a:srgbClr val="1B2B28"/>
+                </a:solidFill>
+              </a:rPr>
+              <a:t>复现：cd 工程化项目/p21_pandas_clean &amp;&amp; python -m pytest -q -o addopts=''</a:t>
+            </a:r>
+          </a:p>
+          <a:p>
+            <a:pPr algn="l">
+              <a:lnSpc>
+                <a:spcPct val="126000"/>
+              </a:lnSpc>
+            </a:pPr>
+            <a:r>
+              <a:rPr sz="850" b="0">
+                <a:solidFill>
+                  <a:srgbClr val="1B2B28"/>
+                </a:solidFill>
+              </a:rPr>
+              <a:t>工单提交：截图需含终端标题栏的文件名与完整输出，退出码 0 才算全绿。</a:t>
+            </a:r>
+          </a:p>
+        </p:txBody>
+      </p:sp>
+    </p:spTree>
+  </p:cSld>
+  <p:clrMapOvr>
+    <a:masterClrMapping/>
+  </p:clrMapOvr>
+</p:sld>
+</file>
+
 <file path=ppt/slides/slide7.xml><?xml version="1.0" encoding="utf-8"?>
 <p:sld xmlns:a="http://schemas.openxmlformats.org/drawingml/2006/main" xmlns:p="http://schemas.openxmlformats.org/presentationml/2006/main" xmlns:r="http://schemas.openxmlformats.org/officeDocument/2006/relationships">
   <p:cSld>
@@ -60386,7 +63501,7 @@
                 </a:solidFill>
                 <a:latin typeface="微软雅黑"/>
               </a:rPr>
-              <a:t>7 / 64</a:t>
+              <a:t>7 / 67</a:t>
             </a:r>
           </a:p>
         </p:txBody>
@@ -61241,7 +64356,7 @@
                 </a:solidFill>
                 <a:latin typeface="微软雅黑"/>
               </a:rPr>
-              <a:t>8 / 64</a:t>
+              <a:t>8 / 67</a:t>
             </a:r>
           </a:p>
         </p:txBody>
@@ -62843,7 +65958,7 @@
                 </a:solidFill>
                 <a:latin typeface="微软雅黑"/>
               </a:rPr>
-              <a:t>9 / 64</a:t>
+              <a:t>9 / 67</a:t>
             </a:r>
           </a:p>
         </p:txBody>
